--- a/docs/theme-preview/pptx/executive.pptx
+++ b/docs/theme-preview/pptx/executive.pptx
@@ -11205,7 +11205,7 @@
                 <a:ea typeface="Pretendard" pitchFamily="34" charset="-122"/>
                 <a:cs typeface="Pretendard" pitchFamily="34" charset="-120"/>
               </a:rPr>
-              <a:t>Markdown Semantics</a:t>
+              <a:t>Semantic Blocks</a:t>
             </a:r>
             <a:endParaRPr lang="en-US" sz="2200" dirty="0"/>
           </a:p>
@@ -14744,7 +14744,7 @@
                 <a:ea typeface="Pretendard" pitchFamily="34" charset="-122"/>
                 <a:cs typeface="Pretendard" pitchFamily="34" charset="-120"/>
               </a:rPr>
-              <a:t>Markdown Semantics</a:t>
+              <a:t>Semantic Blocks</a:t>
             </a:r>
             <a:endParaRPr lang="en-US" sz="3400" dirty="0"/>
           </a:p>

--- a/docs/theme-preview/pptx/executive.pptx
+++ b/docs/theme-preview/pptx/executive.pptx
@@ -125,7 +125,7 @@
 </p:presentation>
 </file>
 
-<file path=ppt/charts/chart4.xml><?xml version="1.0" encoding="utf-8"?>
+<file path=ppt/charts/chart2.xml><?xml version="1.0" encoding="utf-8"?>
 <c:chartSpace xmlns:c="http://schemas.openxmlformats.org/drawingml/2006/chart" xmlns:a="http://schemas.openxmlformats.org/drawingml/2006/main" xmlns:r="http://schemas.openxmlformats.org/officeDocument/2006/relationships">
   <c:date1904 val="0"/>
   <c:roundedCorners val="1"/>
@@ -10200,8 +10200,37 @@
         </p:nvSpPr>
         <p:spPr>
           <a:xfrm>
-            <a:off x="914400" y="1417320"/>
-            <a:ext cx="73152" cy="868680"/>
+            <a:off x="786384" y="1956816"/>
+            <a:ext cx="32004" cy="3483864"/>
+          </a:xfrm>
+          <a:prstGeom prst="rect">
+            <a:avLst/>
+          </a:prstGeom>
+          <a:solidFill>
+            <a:srgbClr val="BFDBFE">
+              <a:alpha val="80000"/>
+            </a:srgbClr>
+          </a:solidFill>
+          <a:ln w="12700">
+            <a:solidFill>
+              <a:srgbClr val="BFDBFE">
+                <a:alpha val="0"/>
+              </a:srgbClr>
+            </a:solidFill>
+            <a:prstDash val="solid"/>
+          </a:ln>
+        </p:spPr>
+      </p:sp>
+      <p:sp>
+        <p:nvSpPr>
+          <p:cNvPr id="6" name="Shape 4"/>
+          <p:cNvSpPr/>
+          <p:nvPr/>
+        </p:nvSpPr>
+        <p:spPr>
+          <a:xfrm>
+            <a:off x="914400" y="1865376"/>
+            <a:ext cx="73152" cy="1024128"/>
           </a:xfrm>
           <a:prstGeom prst="rect">
             <a:avLst/>
@@ -10221,14 +10250,14 @@
       </p:sp>
       <p:sp>
         <p:nvSpPr>
-          <p:cNvPr id="6" name="Shape 4"/>
-          <p:cNvSpPr/>
-          <p:nvPr/>
-        </p:nvSpPr>
-        <p:spPr>
-          <a:xfrm>
-            <a:off x="914400" y="2560320"/>
-            <a:ext cx="73152" cy="868680"/>
+          <p:cNvPr id="7" name="Shape 5"/>
+          <p:cNvSpPr/>
+          <p:nvPr/>
+        </p:nvSpPr>
+        <p:spPr>
+          <a:xfrm>
+            <a:off x="914400" y="3191256"/>
+            <a:ext cx="73152" cy="1024128"/>
           </a:xfrm>
           <a:prstGeom prst="rect">
             <a:avLst/>
@@ -10248,14 +10277,14 @@
       </p:sp>
       <p:sp>
         <p:nvSpPr>
-          <p:cNvPr id="7" name="Shape 5"/>
-          <p:cNvSpPr/>
-          <p:nvPr/>
-        </p:nvSpPr>
-        <p:spPr>
-          <a:xfrm>
-            <a:off x="914400" y="3703320"/>
-            <a:ext cx="73152" cy="868680"/>
+          <p:cNvPr id="8" name="Shape 6"/>
+          <p:cNvSpPr/>
+          <p:nvPr/>
+        </p:nvSpPr>
+        <p:spPr>
+          <a:xfrm>
+            <a:off x="914400" y="4507992"/>
+            <a:ext cx="73152" cy="1024128"/>
           </a:xfrm>
           <a:prstGeom prst="rect">
             <a:avLst/>
@@ -10275,7 +10304,7 @@
       </p:sp>
       <p:pic>
         <p:nvPicPr>
-          <p:cNvPr id="8" name="Image 0" descr="preencoded.png">    </p:cNvPr>
+          <p:cNvPr id="9" name="Image 0" descr="preencoded.png">    </p:cNvPr>
           <p:cNvPicPr>
             <a:picLocks noChangeAspect="1"/>
           </p:cNvPicPr>
@@ -10295,8 +10324,8 @@
         </p:blipFill>
         <p:spPr>
           <a:xfrm>
-            <a:off x="914400" y="1417320"/>
-            <a:ext cx="10241280" cy="868680"/>
+            <a:off x="914400" y="1865376"/>
+            <a:ext cx="10241280" cy="1024128"/>
           </a:xfrm>
           <a:prstGeom prst="rect">
             <a:avLst/>
@@ -10305,14 +10334,14 @@
       </p:pic>
       <p:sp>
         <p:nvSpPr>
-          <p:cNvPr id="9" name="Shape 6"/>
-          <p:cNvSpPr/>
-          <p:nvPr/>
-        </p:nvSpPr>
-        <p:spPr>
-          <a:xfrm>
-            <a:off x="914400" y="1417320"/>
-            <a:ext cx="10241280" cy="868680"/>
+          <p:cNvPr id="10" name="Shape 7"/>
+          <p:cNvSpPr/>
+          <p:nvPr/>
+        </p:nvSpPr>
+        <p:spPr>
+          <a:xfrm>
+            <a:off x="914400" y="1865376"/>
+            <a:ext cx="10241280" cy="1024128"/>
           </a:xfrm>
           <a:prstGeom prst="rect">
             <a:avLst/>
@@ -10341,7 +10370,7 @@
       </p:sp>
       <p:pic>
         <p:nvPicPr>
-          <p:cNvPr id="10" name="Image 1" descr="preencoded.png">    </p:cNvPr>
+          <p:cNvPr id="11" name="Image 1" descr="preencoded.png">    </p:cNvPr>
           <p:cNvPicPr>
             <a:picLocks noChangeAspect="1"/>
           </p:cNvPicPr>
@@ -10361,8 +10390,8 @@
         </p:blipFill>
         <p:spPr>
           <a:xfrm>
-            <a:off x="914400" y="2560320"/>
-            <a:ext cx="10241280" cy="868680"/>
+            <a:off x="914400" y="3191256"/>
+            <a:ext cx="10241280" cy="1024128"/>
           </a:xfrm>
           <a:prstGeom prst="rect">
             <a:avLst/>
@@ -10371,14 +10400,14 @@
       </p:pic>
       <p:sp>
         <p:nvSpPr>
-          <p:cNvPr id="11" name="Shape 7"/>
-          <p:cNvSpPr/>
-          <p:nvPr/>
-        </p:nvSpPr>
-        <p:spPr>
-          <a:xfrm>
-            <a:off x="914400" y="2560320"/>
-            <a:ext cx="10241280" cy="868680"/>
+          <p:cNvPr id="12" name="Shape 8"/>
+          <p:cNvSpPr/>
+          <p:nvPr/>
+        </p:nvSpPr>
+        <p:spPr>
+          <a:xfrm>
+            <a:off x="914400" y="3191256"/>
+            <a:ext cx="10241280" cy="1024128"/>
           </a:xfrm>
           <a:prstGeom prst="rect">
             <a:avLst/>
@@ -10407,7 +10436,7 @@
       </p:sp>
       <p:pic>
         <p:nvPicPr>
-          <p:cNvPr id="12" name="Image 2" descr="preencoded.png">    </p:cNvPr>
+          <p:cNvPr id="13" name="Image 2" descr="preencoded.png">    </p:cNvPr>
           <p:cNvPicPr>
             <a:picLocks noChangeAspect="1"/>
           </p:cNvPicPr>
@@ -10427,8 +10456,8 @@
         </p:blipFill>
         <p:spPr>
           <a:xfrm>
-            <a:off x="914400" y="3703320"/>
-            <a:ext cx="10241280" cy="868680"/>
+            <a:off x="914400" y="4507992"/>
+            <a:ext cx="10241280" cy="1024128"/>
           </a:xfrm>
           <a:prstGeom prst="rect">
             <a:avLst/>
@@ -10437,14 +10466,14 @@
       </p:pic>
       <p:sp>
         <p:nvSpPr>
-          <p:cNvPr id="13" name="Shape 8"/>
-          <p:cNvSpPr/>
-          <p:nvPr/>
-        </p:nvSpPr>
-        <p:spPr>
-          <a:xfrm>
-            <a:off x="914400" y="3703320"/>
-            <a:ext cx="10241280" cy="868680"/>
+          <p:cNvPr id="14" name="Shape 9"/>
+          <p:cNvSpPr/>
+          <p:nvPr/>
+        </p:nvSpPr>
+        <p:spPr>
+          <a:xfrm>
+            <a:off x="914400" y="4507992"/>
+            <a:ext cx="10241280" cy="1024128"/>
           </a:xfrm>
           <a:prstGeom prst="rect">
             <a:avLst/>
@@ -10473,7 +10502,7 @@
       </p:sp>
       <p:sp>
         <p:nvSpPr>
-          <p:cNvPr id="14" name="Text 9"/>
+          <p:cNvPr id="15" name="Text 10"/>
           <p:cNvSpPr txBox="1"/>
           <p:nvPr/>
         </p:nvSpPr>
@@ -10515,18 +10544,18 @@
       </p:sp>
       <p:sp>
         <p:nvSpPr>
-          <p:cNvPr id="15" name="Shape 10"/>
-          <p:cNvSpPr/>
-          <p:nvPr/>
-        </p:nvSpPr>
-        <p:spPr>
-          <a:xfrm>
-            <a:off x="1097280" y="1623060"/>
-            <a:ext cx="457200" cy="457200"/>
+          <p:cNvPr id="16" name="Shape 11"/>
+          <p:cNvSpPr/>
+          <p:nvPr/>
+        </p:nvSpPr>
+        <p:spPr>
+          <a:xfrm>
+            <a:off x="1097280" y="2140428"/>
+            <a:ext cx="474025" cy="474025"/>
           </a:xfrm>
           <a:prstGeom prst="roundRect">
             <a:avLst>
-              <a:gd name="adj" fmla="val 8000"/>
+              <a:gd name="adj" fmla="val 7716"/>
             </a:avLst>
           </a:prstGeom>
           <a:solidFill>
@@ -10542,7 +10571,7 @@
       </p:sp>
       <p:pic>
         <p:nvPicPr>
-          <p:cNvPr id="16" name="Image 3" descr="flow icon from tabler-icons (MIT)">    </p:cNvPr>
+          <p:cNvPr id="17" name="Image 3" descr="flow icon from tabler-icons (MIT)">    </p:cNvPr>
           <p:cNvPicPr>
             <a:picLocks noChangeAspect="1"/>
           </p:cNvPicPr>
@@ -10562,8 +10591,8 @@
         </p:blipFill>
         <p:spPr>
           <a:xfrm>
-            <a:off x="1170432" y="1696212"/>
-            <a:ext cx="310896" cy="310896"/>
+            <a:off x="1170432" y="2213580"/>
+            <a:ext cx="327721" cy="327721"/>
           </a:xfrm>
           <a:prstGeom prst="rect">
             <a:avLst/>
@@ -10572,14 +10601,14 @@
       </p:pic>
       <p:sp>
         <p:nvSpPr>
-          <p:cNvPr id="17" name="Text 11"/>
+          <p:cNvPr id="18" name="Text 12"/>
           <p:cNvSpPr txBox="1"/>
           <p:nvPr/>
         </p:nvSpPr>
         <p:spPr>
           <a:xfrm>
-            <a:off x="1682496" y="1508760"/>
-            <a:ext cx="9272016" cy="685800"/>
+            <a:off x="1699321" y="1957548"/>
+            <a:ext cx="9255191" cy="839785"/>
           </a:xfrm>
           <a:prstGeom prst="rect">
             <a:avLst/>
@@ -10631,18 +10660,18 @@
       </p:sp>
       <p:sp>
         <p:nvSpPr>
-          <p:cNvPr id="18" name="Shape 12"/>
-          <p:cNvSpPr/>
-          <p:nvPr/>
-        </p:nvSpPr>
-        <p:spPr>
-          <a:xfrm>
-            <a:off x="1097280" y="2766060"/>
-            <a:ext cx="457200" cy="457200"/>
+          <p:cNvPr id="19" name="Shape 13"/>
+          <p:cNvSpPr/>
+          <p:nvPr/>
+        </p:nvSpPr>
+        <p:spPr>
+          <a:xfrm>
+            <a:off x="1097280" y="3466308"/>
+            <a:ext cx="474025" cy="474025"/>
           </a:xfrm>
           <a:prstGeom prst="roundRect">
             <a:avLst>
-              <a:gd name="adj" fmla="val 8000"/>
+              <a:gd name="adj" fmla="val 7716"/>
             </a:avLst>
           </a:prstGeom>
           <a:solidFill>
@@ -10658,7 +10687,7 @@
       </p:sp>
       <p:pic>
         <p:nvPicPr>
-          <p:cNvPr id="19" name="Image 4" descr="verified icon from tabler-icons (MIT)">    </p:cNvPr>
+          <p:cNvPr id="20" name="Image 4" descr="verified icon from tabler-icons (MIT)">    </p:cNvPr>
           <p:cNvPicPr>
             <a:picLocks noChangeAspect="1"/>
           </p:cNvPicPr>
@@ -10678,8 +10707,8 @@
         </p:blipFill>
         <p:spPr>
           <a:xfrm>
-            <a:off x="1170432" y="2839212"/>
-            <a:ext cx="310896" cy="310896"/>
+            <a:off x="1170432" y="3539460"/>
+            <a:ext cx="327721" cy="327721"/>
           </a:xfrm>
           <a:prstGeom prst="rect">
             <a:avLst/>
@@ -10688,14 +10717,14 @@
       </p:pic>
       <p:sp>
         <p:nvSpPr>
-          <p:cNvPr id="20" name="Text 13"/>
+          <p:cNvPr id="21" name="Text 14"/>
           <p:cNvSpPr txBox="1"/>
           <p:nvPr/>
         </p:nvSpPr>
         <p:spPr>
           <a:xfrm>
-            <a:off x="1682496" y="2651760"/>
-            <a:ext cx="9272016" cy="685800"/>
+            <a:off x="1699321" y="3283428"/>
+            <a:ext cx="9255191" cy="839785"/>
           </a:xfrm>
           <a:prstGeom prst="rect">
             <a:avLst/>
@@ -10747,18 +10776,18 @@
       </p:sp>
       <p:sp>
         <p:nvSpPr>
-          <p:cNvPr id="21" name="Shape 14"/>
-          <p:cNvSpPr/>
-          <p:nvPr/>
-        </p:nvSpPr>
-        <p:spPr>
-          <a:xfrm>
-            <a:off x="1097280" y="3909060"/>
-            <a:ext cx="457200" cy="457200"/>
+          <p:cNvPr id="22" name="Shape 15"/>
+          <p:cNvSpPr/>
+          <p:nvPr/>
+        </p:nvSpPr>
+        <p:spPr>
+          <a:xfrm>
+            <a:off x="1097280" y="4783044"/>
+            <a:ext cx="474025" cy="474025"/>
           </a:xfrm>
           <a:prstGeom prst="roundRect">
             <a:avLst>
-              <a:gd name="adj" fmla="val 8000"/>
+              <a:gd name="adj" fmla="val 7716"/>
             </a:avLst>
           </a:prstGeom>
           <a:solidFill>
@@ -10774,7 +10803,7 @@
       </p:sp>
       <p:pic>
         <p:nvPicPr>
-          <p:cNvPr id="22" name="Image 5" descr="spark icon from tabler-icons (MIT)">    </p:cNvPr>
+          <p:cNvPr id="23" name="Image 5" descr="spark icon from tabler-icons (MIT)">    </p:cNvPr>
           <p:cNvPicPr>
             <a:picLocks noChangeAspect="1"/>
           </p:cNvPicPr>
@@ -10794,8 +10823,8 @@
         </p:blipFill>
         <p:spPr>
           <a:xfrm>
-            <a:off x="1170432" y="3982212"/>
-            <a:ext cx="310896" cy="310896"/>
+            <a:off x="1170432" y="4856196"/>
+            <a:ext cx="327721" cy="327721"/>
           </a:xfrm>
           <a:prstGeom prst="rect">
             <a:avLst/>
@@ -10804,14 +10833,14 @@
       </p:pic>
       <p:sp>
         <p:nvSpPr>
-          <p:cNvPr id="23" name="Text 15"/>
+          <p:cNvPr id="24" name="Text 16"/>
           <p:cNvSpPr txBox="1"/>
           <p:nvPr/>
         </p:nvSpPr>
         <p:spPr>
           <a:xfrm>
-            <a:off x="1682496" y="3794760"/>
-            <a:ext cx="9272016" cy="685800"/>
+            <a:off x="1699321" y="4600164"/>
+            <a:ext cx="9255191" cy="839785"/>
           </a:xfrm>
           <a:prstGeom prst="rect">
             <a:avLst/>
@@ -10982,8 +11011,8 @@
         </p:nvSpPr>
         <p:spPr>
           <a:xfrm>
-            <a:off x="914400" y="1463040"/>
-            <a:ext cx="10241280" cy="73152"/>
+            <a:off x="822960" y="1188720"/>
+            <a:ext cx="10515600" cy="45720"/>
           </a:xfrm>
           <a:prstGeom prst="rect">
             <a:avLst/>
@@ -11003,7 +11032,387 @@
       </p:sp>
       <p:sp>
         <p:nvSpPr>
-          <p:cNvPr id="6" name="Text 4"/>
+          <p:cNvPr id="6" name="Shape 4"/>
+          <p:cNvSpPr/>
+          <p:nvPr/>
+        </p:nvSpPr>
+        <p:spPr>
+          <a:xfrm>
+            <a:off x="822960" y="6199632"/>
+            <a:ext cx="2011680" cy="45720"/>
+          </a:xfrm>
+          <a:prstGeom prst="rect">
+            <a:avLst/>
+          </a:prstGeom>
+          <a:solidFill>
+            <a:srgbClr val="BFDBFE"/>
+          </a:solidFill>
+          <a:ln w="12700">
+            <a:solidFill>
+              <a:srgbClr val="BFDBFE">
+                <a:alpha val="0"/>
+              </a:srgbClr>
+            </a:solidFill>
+            <a:prstDash val="solid"/>
+          </a:ln>
+        </p:spPr>
+      </p:sp>
+      <p:sp>
+        <p:nvSpPr>
+          <p:cNvPr id="7" name="Shape 5"/>
+          <p:cNvSpPr/>
+          <p:nvPr/>
+        </p:nvSpPr>
+        <p:spPr>
+          <a:xfrm>
+            <a:off x="6080760" y="1389888"/>
+            <a:ext cx="22860" cy="4663440"/>
+          </a:xfrm>
+          <a:prstGeom prst="rect">
+            <a:avLst/>
+          </a:prstGeom>
+          <a:solidFill>
+            <a:srgbClr val="CBD5E1">
+              <a:alpha val="90000"/>
+            </a:srgbClr>
+          </a:solidFill>
+          <a:ln w="12700">
+            <a:solidFill>
+              <a:srgbClr val="CBD5E1">
+                <a:alpha val="0"/>
+              </a:srgbClr>
+            </a:solidFill>
+            <a:prstDash val="solid"/>
+          </a:ln>
+        </p:spPr>
+      </p:sp>
+      <p:sp>
+        <p:nvSpPr>
+          <p:cNvPr id="8" name="Shape 6"/>
+          <p:cNvSpPr/>
+          <p:nvPr/>
+        </p:nvSpPr>
+        <p:spPr>
+          <a:xfrm>
+            <a:off x="822960" y="1389888"/>
+            <a:ext cx="73152" cy="658368"/>
+          </a:xfrm>
+          <a:prstGeom prst="rect">
+            <a:avLst/>
+          </a:prstGeom>
+          <a:solidFill>
+            <a:srgbClr val="1D4ED8"/>
+          </a:solidFill>
+          <a:ln w="12700">
+            <a:solidFill>
+              <a:srgbClr val="1D4ED8">
+                <a:alpha val="0"/>
+              </a:srgbClr>
+            </a:solidFill>
+            <a:prstDash val="solid"/>
+          </a:ln>
+        </p:spPr>
+      </p:sp>
+      <p:sp>
+        <p:nvSpPr>
+          <p:cNvPr id="9" name="Shape 7"/>
+          <p:cNvSpPr/>
+          <p:nvPr/>
+        </p:nvSpPr>
+        <p:spPr>
+          <a:xfrm>
+            <a:off x="822960" y="2194560"/>
+            <a:ext cx="73152" cy="658368"/>
+          </a:xfrm>
+          <a:prstGeom prst="rect">
+            <a:avLst/>
+          </a:prstGeom>
+          <a:solidFill>
+            <a:srgbClr val="BFDBFE"/>
+          </a:solidFill>
+          <a:ln w="12700">
+            <a:solidFill>
+              <a:srgbClr val="BFDBFE">
+                <a:alpha val="0"/>
+              </a:srgbClr>
+            </a:solidFill>
+            <a:prstDash val="solid"/>
+          </a:ln>
+        </p:spPr>
+      </p:sp>
+      <p:sp>
+        <p:nvSpPr>
+          <p:cNvPr id="10" name="Shape 8"/>
+          <p:cNvSpPr/>
+          <p:nvPr/>
+        </p:nvSpPr>
+        <p:spPr>
+          <a:xfrm>
+            <a:off x="822960" y="2990088"/>
+            <a:ext cx="73152" cy="658368"/>
+          </a:xfrm>
+          <a:prstGeom prst="rect">
+            <a:avLst/>
+          </a:prstGeom>
+          <a:solidFill>
+            <a:srgbClr val="1D4ED8"/>
+          </a:solidFill>
+          <a:ln w="12700">
+            <a:solidFill>
+              <a:srgbClr val="1D4ED8">
+                <a:alpha val="0"/>
+              </a:srgbClr>
+            </a:solidFill>
+            <a:prstDash val="solid"/>
+          </a:ln>
+        </p:spPr>
+      </p:sp>
+      <p:sp>
+        <p:nvSpPr>
+          <p:cNvPr id="11" name="Shape 9"/>
+          <p:cNvSpPr/>
+          <p:nvPr/>
+        </p:nvSpPr>
+        <p:spPr>
+          <a:xfrm>
+            <a:off x="822960" y="3794760"/>
+            <a:ext cx="73152" cy="658368"/>
+          </a:xfrm>
+          <a:prstGeom prst="rect">
+            <a:avLst/>
+          </a:prstGeom>
+          <a:solidFill>
+            <a:srgbClr val="BFDBFE"/>
+          </a:solidFill>
+          <a:ln w="12700">
+            <a:solidFill>
+              <a:srgbClr val="BFDBFE">
+                <a:alpha val="0"/>
+              </a:srgbClr>
+            </a:solidFill>
+            <a:prstDash val="solid"/>
+          </a:ln>
+        </p:spPr>
+      </p:sp>
+      <p:sp>
+        <p:nvSpPr>
+          <p:cNvPr id="12" name="Shape 10"/>
+          <p:cNvSpPr/>
+          <p:nvPr/>
+        </p:nvSpPr>
+        <p:spPr>
+          <a:xfrm>
+            <a:off x="822960" y="4599432"/>
+            <a:ext cx="73152" cy="658368"/>
+          </a:xfrm>
+          <a:prstGeom prst="rect">
+            <a:avLst/>
+          </a:prstGeom>
+          <a:solidFill>
+            <a:srgbClr val="1D4ED8"/>
+          </a:solidFill>
+          <a:ln w="12700">
+            <a:solidFill>
+              <a:srgbClr val="1D4ED8">
+                <a:alpha val="0"/>
+              </a:srgbClr>
+            </a:solidFill>
+            <a:prstDash val="solid"/>
+          </a:ln>
+        </p:spPr>
+      </p:sp>
+      <p:sp>
+        <p:nvSpPr>
+          <p:cNvPr id="13" name="Shape 11"/>
+          <p:cNvSpPr/>
+          <p:nvPr/>
+        </p:nvSpPr>
+        <p:spPr>
+          <a:xfrm>
+            <a:off x="822960" y="5394960"/>
+            <a:ext cx="73152" cy="658368"/>
+          </a:xfrm>
+          <a:prstGeom prst="rect">
+            <a:avLst/>
+          </a:prstGeom>
+          <a:solidFill>
+            <a:srgbClr val="BFDBFE"/>
+          </a:solidFill>
+          <a:ln w="12700">
+            <a:solidFill>
+              <a:srgbClr val="BFDBFE">
+                <a:alpha val="0"/>
+              </a:srgbClr>
+            </a:solidFill>
+            <a:prstDash val="solid"/>
+          </a:ln>
+        </p:spPr>
+      </p:sp>
+      <p:sp>
+        <p:nvSpPr>
+          <p:cNvPr id="14" name="Shape 12"/>
+          <p:cNvSpPr/>
+          <p:nvPr/>
+        </p:nvSpPr>
+        <p:spPr>
+          <a:xfrm>
+            <a:off x="6272784" y="1389888"/>
+            <a:ext cx="73152" cy="658368"/>
+          </a:xfrm>
+          <a:prstGeom prst="rect">
+            <a:avLst/>
+          </a:prstGeom>
+          <a:solidFill>
+            <a:srgbClr val="1D4ED8"/>
+          </a:solidFill>
+          <a:ln w="12700">
+            <a:solidFill>
+              <a:srgbClr val="1D4ED8">
+                <a:alpha val="0"/>
+              </a:srgbClr>
+            </a:solidFill>
+            <a:prstDash val="solid"/>
+          </a:ln>
+        </p:spPr>
+      </p:sp>
+      <p:sp>
+        <p:nvSpPr>
+          <p:cNvPr id="15" name="Shape 13"/>
+          <p:cNvSpPr/>
+          <p:nvPr/>
+        </p:nvSpPr>
+        <p:spPr>
+          <a:xfrm>
+            <a:off x="6272784" y="2194560"/>
+            <a:ext cx="73152" cy="658368"/>
+          </a:xfrm>
+          <a:prstGeom prst="rect">
+            <a:avLst/>
+          </a:prstGeom>
+          <a:solidFill>
+            <a:srgbClr val="BFDBFE"/>
+          </a:solidFill>
+          <a:ln w="12700">
+            <a:solidFill>
+              <a:srgbClr val="BFDBFE">
+                <a:alpha val="0"/>
+              </a:srgbClr>
+            </a:solidFill>
+            <a:prstDash val="solid"/>
+          </a:ln>
+        </p:spPr>
+      </p:sp>
+      <p:sp>
+        <p:nvSpPr>
+          <p:cNvPr id="16" name="Shape 14"/>
+          <p:cNvSpPr/>
+          <p:nvPr/>
+        </p:nvSpPr>
+        <p:spPr>
+          <a:xfrm>
+            <a:off x="6272784" y="2990088"/>
+            <a:ext cx="73152" cy="658368"/>
+          </a:xfrm>
+          <a:prstGeom prst="rect">
+            <a:avLst/>
+          </a:prstGeom>
+          <a:solidFill>
+            <a:srgbClr val="1D4ED8"/>
+          </a:solidFill>
+          <a:ln w="12700">
+            <a:solidFill>
+              <a:srgbClr val="1D4ED8">
+                <a:alpha val="0"/>
+              </a:srgbClr>
+            </a:solidFill>
+            <a:prstDash val="solid"/>
+          </a:ln>
+        </p:spPr>
+      </p:sp>
+      <p:sp>
+        <p:nvSpPr>
+          <p:cNvPr id="17" name="Shape 15"/>
+          <p:cNvSpPr/>
+          <p:nvPr/>
+        </p:nvSpPr>
+        <p:spPr>
+          <a:xfrm>
+            <a:off x="6272784" y="3794760"/>
+            <a:ext cx="73152" cy="658368"/>
+          </a:xfrm>
+          <a:prstGeom prst="rect">
+            <a:avLst/>
+          </a:prstGeom>
+          <a:solidFill>
+            <a:srgbClr val="BFDBFE"/>
+          </a:solidFill>
+          <a:ln w="12700">
+            <a:solidFill>
+              <a:srgbClr val="BFDBFE">
+                <a:alpha val="0"/>
+              </a:srgbClr>
+            </a:solidFill>
+            <a:prstDash val="solid"/>
+          </a:ln>
+        </p:spPr>
+      </p:sp>
+      <p:sp>
+        <p:nvSpPr>
+          <p:cNvPr id="18" name="Shape 16"/>
+          <p:cNvSpPr/>
+          <p:nvPr/>
+        </p:nvSpPr>
+        <p:spPr>
+          <a:xfrm>
+            <a:off x="6272784" y="4599432"/>
+            <a:ext cx="73152" cy="658368"/>
+          </a:xfrm>
+          <a:prstGeom prst="rect">
+            <a:avLst/>
+          </a:prstGeom>
+          <a:solidFill>
+            <a:srgbClr val="1D4ED8"/>
+          </a:solidFill>
+          <a:ln w="12700">
+            <a:solidFill>
+              <a:srgbClr val="1D4ED8">
+                <a:alpha val="0"/>
+              </a:srgbClr>
+            </a:solidFill>
+            <a:prstDash val="solid"/>
+          </a:ln>
+        </p:spPr>
+      </p:sp>
+      <p:sp>
+        <p:nvSpPr>
+          <p:cNvPr id="19" name="Shape 17"/>
+          <p:cNvSpPr/>
+          <p:nvPr/>
+        </p:nvSpPr>
+        <p:spPr>
+          <a:xfrm>
+            <a:off x="6272784" y="5394960"/>
+            <a:ext cx="73152" cy="658368"/>
+          </a:xfrm>
+          <a:prstGeom prst="rect">
+            <a:avLst/>
+          </a:prstGeom>
+          <a:solidFill>
+            <a:srgbClr val="BFDBFE"/>
+          </a:solidFill>
+          <a:ln w="12700">
+            <a:solidFill>
+              <a:srgbClr val="BFDBFE">
+                <a:alpha val="0"/>
+              </a:srgbClr>
+            </a:solidFill>
+            <a:prstDash val="solid"/>
+          </a:ln>
+        </p:spPr>
+      </p:sp>
+      <p:sp>
+        <p:nvSpPr>
+          <p:cNvPr id="20" name="Text 18"/>
           <p:cNvSpPr txBox="1"/>
           <p:nvPr/>
         </p:nvSpPr>
@@ -11045,14 +11454,14 @@
       </p:sp>
       <p:sp>
         <p:nvSpPr>
-          <p:cNvPr id="7" name="Text 5"/>
+          <p:cNvPr id="21" name="Text 19"/>
           <p:cNvSpPr txBox="1"/>
           <p:nvPr/>
         </p:nvSpPr>
         <p:spPr>
           <a:xfrm>
-            <a:off x="987552" y="1572768"/>
-            <a:ext cx="10094976" cy="355092"/>
+            <a:off x="1042416" y="1481328"/>
+            <a:ext cx="4645152" cy="475488"/>
           </a:xfrm>
           <a:prstGeom prst="rect">
             <a:avLst/>
@@ -11064,14 +11473,14 @@
           <a:bodyPr wrap="square" lIns="0" tIns="25400" rIns="25400" bIns="0" rtlCol="0" anchor="ctr"/>
           <a:lstStyle/>
           <a:p>
-            <a:pPr algn="l" indent="0" marL="0">
+            <a:pPr algn="ctr" indent="0" marL="0">
               <a:lnSpc>
                 <a:spcPct val="120000"/>
               </a:lnSpc>
               <a:buNone/>
             </a:pPr>
             <a:r>
-              <a:rPr lang="en-US" sz="2200" dirty="0">
+              <a:rPr lang="en-US" sz="1800" dirty="0">
                 <a:solidFill>
                   <a:srgbClr val="0F172A"/>
                 </a:solidFill>
@@ -11079,22 +11488,22 @@
                 <a:ea typeface="Pretendard" pitchFamily="34" charset="-122"/>
                 <a:cs typeface="Pretendard" pitchFamily="34" charset="-120"/>
               </a:rPr>
-              <a:t>Preview Purpose</a:t>
+              <a:t>01  Preview Purpose</a:t>
             </a:r>
-            <a:endParaRPr lang="en-US" sz="2200" dirty="0"/>
+            <a:endParaRPr lang="en-US" sz="1800" dirty="0"/>
           </a:p>
         </p:txBody>
       </p:sp>
       <p:sp>
         <p:nvSpPr>
-          <p:cNvPr id="8" name="Text 6"/>
+          <p:cNvPr id="22" name="Text 20"/>
           <p:cNvSpPr txBox="1"/>
           <p:nvPr/>
         </p:nvSpPr>
         <p:spPr>
           <a:xfrm>
-            <a:off x="987552" y="1927860"/>
-            <a:ext cx="10094976" cy="355092"/>
+            <a:off x="1042416" y="2286000"/>
+            <a:ext cx="4645152" cy="475488"/>
           </a:xfrm>
           <a:prstGeom prst="rect">
             <a:avLst/>
@@ -11106,14 +11515,14 @@
           <a:bodyPr wrap="square" lIns="0" tIns="25400" rIns="25400" bIns="0" rtlCol="0" anchor="ctr"/>
           <a:lstStyle/>
           <a:p>
-            <a:pPr algn="l" indent="0" marL="0">
+            <a:pPr algn="ctr" indent="0" marL="0">
               <a:lnSpc>
                 <a:spcPct val="120000"/>
               </a:lnSpc>
               <a:buNone/>
             </a:pPr>
             <a:r>
-              <a:rPr lang="en-US" sz="2200" dirty="0">
+              <a:rPr lang="en-US" sz="1800" dirty="0">
                 <a:solidFill>
                   <a:srgbClr val="0F172A"/>
                 </a:solidFill>
@@ -11121,22 +11530,22 @@
                 <a:ea typeface="Pretendard" pitchFamily="34" charset="-122"/>
                 <a:cs typeface="Pretendard" pitchFamily="34" charset="-120"/>
               </a:rPr>
-              <a:t>Composition Contract</a:t>
+              <a:t>02  Composition Contract</a:t>
             </a:r>
-            <a:endParaRPr lang="en-US" sz="2200" dirty="0"/>
+            <a:endParaRPr lang="en-US" sz="1800" dirty="0"/>
           </a:p>
         </p:txBody>
       </p:sp>
       <p:sp>
         <p:nvSpPr>
-          <p:cNvPr id="9" name="Text 7"/>
+          <p:cNvPr id="23" name="Text 21"/>
           <p:cNvSpPr txBox="1"/>
           <p:nvPr/>
         </p:nvSpPr>
         <p:spPr>
           <a:xfrm>
-            <a:off x="987552" y="2282952"/>
-            <a:ext cx="10094976" cy="355092"/>
+            <a:off x="1042416" y="3081528"/>
+            <a:ext cx="4645152" cy="475488"/>
           </a:xfrm>
           <a:prstGeom prst="rect">
             <a:avLst/>
@@ -11148,14 +11557,14 @@
           <a:bodyPr wrap="square" lIns="0" tIns="25400" rIns="25400" bIns="0" rtlCol="0" anchor="ctr"/>
           <a:lstStyle/>
           <a:p>
-            <a:pPr algn="l" indent="0" marL="0">
+            <a:pPr algn="ctr" indent="0" marL="0">
               <a:lnSpc>
                 <a:spcPct val="120000"/>
               </a:lnSpc>
               <a:buNone/>
             </a:pPr>
             <a:r>
-              <a:rPr lang="en-US" sz="2200" dirty="0">
+              <a:rPr lang="en-US" sz="1800" dirty="0">
                 <a:solidFill>
                   <a:srgbClr val="0F172A"/>
                 </a:solidFill>
@@ -11163,22 +11572,22 @@
                 <a:ea typeface="Pretendard" pitchFamily="34" charset="-122"/>
                 <a:cs typeface="Pretendard" pitchFamily="34" charset="-120"/>
               </a:rPr>
-              <a:t>Style Families</a:t>
+              <a:t>03  Style Families</a:t>
             </a:r>
-            <a:endParaRPr lang="en-US" sz="2200" dirty="0"/>
+            <a:endParaRPr lang="en-US" sz="1800" dirty="0"/>
           </a:p>
         </p:txBody>
       </p:sp>
       <p:sp>
         <p:nvSpPr>
-          <p:cNvPr id="10" name="Text 8"/>
+          <p:cNvPr id="24" name="Text 22"/>
           <p:cNvSpPr txBox="1"/>
           <p:nvPr/>
         </p:nvSpPr>
         <p:spPr>
           <a:xfrm>
-            <a:off x="987552" y="2638044"/>
-            <a:ext cx="10094976" cy="355092"/>
+            <a:off x="1042416" y="3886200"/>
+            <a:ext cx="4645152" cy="475488"/>
           </a:xfrm>
           <a:prstGeom prst="rect">
             <a:avLst/>
@@ -11190,14 +11599,14 @@
           <a:bodyPr wrap="square" lIns="0" tIns="25400" rIns="25400" bIns="0" rtlCol="0" anchor="ctr"/>
           <a:lstStyle/>
           <a:p>
-            <a:pPr algn="l" indent="0" marL="0">
+            <a:pPr algn="ctr" indent="0" marL="0">
               <a:lnSpc>
                 <a:spcPct val="120000"/>
               </a:lnSpc>
               <a:buNone/>
             </a:pPr>
             <a:r>
-              <a:rPr lang="en-US" sz="2200" dirty="0">
+              <a:rPr lang="en-US" sz="1800" dirty="0">
                 <a:solidFill>
                   <a:srgbClr val="0F172A"/>
                 </a:solidFill>
@@ -11205,22 +11614,22 @@
                 <a:ea typeface="Pretendard" pitchFamily="34" charset="-122"/>
                 <a:cs typeface="Pretendard" pitchFamily="34" charset="-120"/>
               </a:rPr>
-              <a:t>Semantic Blocks</a:t>
+              <a:t>04  Semantic Blocks</a:t>
             </a:r>
-            <a:endParaRPr lang="en-US" sz="2200" dirty="0"/>
+            <a:endParaRPr lang="en-US" sz="1800" dirty="0"/>
           </a:p>
         </p:txBody>
       </p:sp>
       <p:sp>
         <p:nvSpPr>
-          <p:cNvPr id="11" name="Text 9"/>
+          <p:cNvPr id="25" name="Text 23"/>
           <p:cNvSpPr txBox="1"/>
           <p:nvPr/>
         </p:nvSpPr>
         <p:spPr>
           <a:xfrm>
-            <a:off x="987552" y="2993136"/>
-            <a:ext cx="10094976" cy="355092"/>
+            <a:off x="1042416" y="4690872"/>
+            <a:ext cx="4645152" cy="475488"/>
           </a:xfrm>
           <a:prstGeom prst="rect">
             <a:avLst/>
@@ -11232,14 +11641,14 @@
           <a:bodyPr wrap="square" lIns="0" tIns="25400" rIns="25400" bIns="0" rtlCol="0" anchor="ctr"/>
           <a:lstStyle/>
           <a:p>
-            <a:pPr algn="l" indent="0" marL="0">
+            <a:pPr algn="ctr" indent="0" marL="0">
               <a:lnSpc>
                 <a:spcPct val="120000"/>
               </a:lnSpc>
               <a:buNone/>
             </a:pPr>
             <a:r>
-              <a:rPr lang="en-US" sz="2200" dirty="0">
+              <a:rPr lang="en-US" sz="1800" dirty="0">
                 <a:solidFill>
                   <a:srgbClr val="0F172A"/>
                 </a:solidFill>
@@ -11247,22 +11656,22 @@
                 <a:ea typeface="Pretendard" pitchFamily="34" charset="-122"/>
                 <a:cs typeface="Pretendard" pitchFamily="34" charset="-120"/>
               </a:rPr>
-              <a:t>Pipeline Diagram</a:t>
+              <a:t>05  Pipeline Diagram</a:t>
             </a:r>
-            <a:endParaRPr lang="en-US" sz="2200" dirty="0"/>
+            <a:endParaRPr lang="en-US" sz="1800" dirty="0"/>
           </a:p>
         </p:txBody>
       </p:sp>
       <p:sp>
         <p:nvSpPr>
-          <p:cNvPr id="12" name="Text 10"/>
+          <p:cNvPr id="26" name="Text 24"/>
           <p:cNvSpPr txBox="1"/>
           <p:nvPr/>
         </p:nvSpPr>
         <p:spPr>
           <a:xfrm>
-            <a:off x="987552" y="3348228"/>
-            <a:ext cx="10094976" cy="355092"/>
+            <a:off x="1042416" y="5486400"/>
+            <a:ext cx="4645152" cy="475488"/>
           </a:xfrm>
           <a:prstGeom prst="rect">
             <a:avLst/>
@@ -11274,14 +11683,14 @@
           <a:bodyPr wrap="square" lIns="0" tIns="25400" rIns="25400" bIns="0" rtlCol="0" anchor="ctr"/>
           <a:lstStyle/>
           <a:p>
-            <a:pPr algn="l" indent="0" marL="0">
+            <a:pPr algn="ctr" indent="0" marL="0">
               <a:lnSpc>
                 <a:spcPct val="120000"/>
               </a:lnSpc>
               <a:buNone/>
             </a:pPr>
             <a:r>
-              <a:rPr lang="en-US" sz="2200" dirty="0">
+              <a:rPr lang="en-US" sz="1800" dirty="0">
                 <a:solidFill>
                   <a:srgbClr val="0F172A"/>
                 </a:solidFill>
@@ -11289,22 +11698,22 @@
                 <a:ea typeface="Pretendard" pitchFamily="34" charset="-122"/>
                 <a:cs typeface="Pretendard" pitchFamily="34" charset="-120"/>
               </a:rPr>
-              <a:t>Table Coherence</a:t>
+              <a:t>06  Table Coherence</a:t>
             </a:r>
-            <a:endParaRPr lang="en-US" sz="2200" dirty="0"/>
+            <a:endParaRPr lang="en-US" sz="1800" dirty="0"/>
           </a:p>
         </p:txBody>
       </p:sp>
       <p:sp>
         <p:nvSpPr>
-          <p:cNvPr id="13" name="Text 11"/>
+          <p:cNvPr id="27" name="Text 25"/>
           <p:cNvSpPr txBox="1"/>
           <p:nvPr/>
         </p:nvSpPr>
         <p:spPr>
           <a:xfrm>
-            <a:off x="987552" y="3703320"/>
-            <a:ext cx="10094976" cy="355092"/>
+            <a:off x="6492240" y="1481328"/>
+            <a:ext cx="4645152" cy="475488"/>
           </a:xfrm>
           <a:prstGeom prst="rect">
             <a:avLst/>
@@ -11316,14 +11725,14 @@
           <a:bodyPr wrap="square" lIns="0" tIns="25400" rIns="25400" bIns="0" rtlCol="0" anchor="ctr"/>
           <a:lstStyle/>
           <a:p>
-            <a:pPr algn="l" indent="0" marL="0">
+            <a:pPr algn="ctr" indent="0" marL="0">
               <a:lnSpc>
                 <a:spcPct val="120000"/>
               </a:lnSpc>
               <a:buNone/>
             </a:pPr>
             <a:r>
-              <a:rPr lang="en-US" sz="2200" dirty="0">
+              <a:rPr lang="en-US" sz="1800" dirty="0">
                 <a:solidFill>
                   <a:srgbClr val="0F172A"/>
                 </a:solidFill>
@@ -11331,22 +11740,22 @@
                 <a:ea typeface="Pretendard" pitchFamily="34" charset="-122"/>
                 <a:cs typeface="Pretendard" pitchFamily="34" charset="-120"/>
               </a:rPr>
-              <a:t>Chart and Table Pair</a:t>
+              <a:t>07  Chart and Table Pair</a:t>
             </a:r>
-            <a:endParaRPr lang="en-US" sz="2200" dirty="0"/>
+            <a:endParaRPr lang="en-US" sz="1800" dirty="0"/>
           </a:p>
         </p:txBody>
       </p:sp>
       <p:sp>
         <p:nvSpPr>
-          <p:cNvPr id="14" name="Text 12"/>
+          <p:cNvPr id="28" name="Text 26"/>
           <p:cNvSpPr txBox="1"/>
           <p:nvPr/>
         </p:nvSpPr>
         <p:spPr>
           <a:xfrm>
-            <a:off x="987552" y="4058412"/>
-            <a:ext cx="10094976" cy="355092"/>
+            <a:off x="6492240" y="2286000"/>
+            <a:ext cx="4645152" cy="475488"/>
           </a:xfrm>
           <a:prstGeom prst="rect">
             <a:avLst/>
@@ -11358,14 +11767,14 @@
           <a:bodyPr wrap="square" lIns="0" tIns="25400" rIns="25400" bIns="0" rtlCol="0" anchor="ctr"/>
           <a:lstStyle/>
           <a:p>
-            <a:pPr algn="l" indent="0" marL="0">
+            <a:pPr algn="ctr" indent="0" marL="0">
               <a:lnSpc>
                 <a:spcPct val="120000"/>
               </a:lnSpc>
               <a:buNone/>
             </a:pPr>
             <a:r>
-              <a:rPr lang="en-US" sz="2200" dirty="0">
+              <a:rPr lang="en-US" sz="1800" dirty="0">
                 <a:solidFill>
                   <a:srgbClr val="0F172A"/>
                 </a:solidFill>
@@ -11373,22 +11782,22 @@
                 <a:ea typeface="Pretendard" pitchFamily="34" charset="-122"/>
                 <a:cs typeface="Pretendard" pitchFamily="34" charset="-120"/>
               </a:rPr>
-              <a:t>Editable Proof Objects</a:t>
+              <a:t>08  Editable Proof Objects</a:t>
             </a:r>
-            <a:endParaRPr lang="en-US" sz="2200" dirty="0"/>
+            <a:endParaRPr lang="en-US" sz="1800" dirty="0"/>
           </a:p>
         </p:txBody>
       </p:sp>
       <p:sp>
         <p:nvSpPr>
-          <p:cNvPr id="15" name="Text 13"/>
+          <p:cNvPr id="29" name="Text 27"/>
           <p:cNvSpPr txBox="1"/>
           <p:nvPr/>
         </p:nvSpPr>
         <p:spPr>
           <a:xfrm>
-            <a:off x="987552" y="4413504"/>
-            <a:ext cx="10094976" cy="355092"/>
+            <a:off x="6492240" y="3081528"/>
+            <a:ext cx="4645152" cy="475488"/>
           </a:xfrm>
           <a:prstGeom prst="rect">
             <a:avLst/>
@@ -11400,14 +11809,14 @@
           <a:bodyPr wrap="square" lIns="0" tIns="25400" rIns="25400" bIns="0" rtlCol="0" anchor="ctr"/>
           <a:lstStyle/>
           <a:p>
-            <a:pPr algn="l" indent="0" marL="0">
+            <a:pPr algn="ctr" indent="0" marL="0">
               <a:lnSpc>
                 <a:spcPct val="120000"/>
               </a:lnSpc>
               <a:buNone/>
             </a:pPr>
             <a:r>
-              <a:rPr lang="en-US" sz="2200" dirty="0">
+              <a:rPr lang="en-US" sz="1800" dirty="0">
                 <a:solidFill>
                   <a:srgbClr val="0F172A"/>
                 </a:solidFill>
@@ -11415,22 +11824,22 @@
                 <a:ea typeface="Pretendard" pitchFamily="34" charset="-122"/>
                 <a:cs typeface="Pretendard" pitchFamily="34" charset="-120"/>
               </a:rPr>
-              <a:t>Object Shape Grammar</a:t>
+              <a:t>09  Object Shape Grammar</a:t>
             </a:r>
-            <a:endParaRPr lang="en-US" sz="2200" dirty="0"/>
+            <a:endParaRPr lang="en-US" sz="1800" dirty="0"/>
           </a:p>
         </p:txBody>
       </p:sp>
       <p:sp>
         <p:nvSpPr>
-          <p:cNvPr id="16" name="Text 14"/>
+          <p:cNvPr id="30" name="Text 28"/>
           <p:cNvSpPr txBox="1"/>
           <p:nvPr/>
         </p:nvSpPr>
         <p:spPr>
           <a:xfrm>
-            <a:off x="987552" y="4768596"/>
-            <a:ext cx="10094976" cy="355092"/>
+            <a:off x="6492240" y="3886200"/>
+            <a:ext cx="4645152" cy="475488"/>
           </a:xfrm>
           <a:prstGeom prst="rect">
             <a:avLst/>
@@ -11442,14 +11851,14 @@
           <a:bodyPr wrap="square" lIns="0" tIns="25400" rIns="25400" bIns="0" rtlCol="0" anchor="ctr"/>
           <a:lstStyle/>
           <a:p>
-            <a:pPr algn="l" indent="0" marL="0">
+            <a:pPr algn="ctr" indent="0" marL="0">
               <a:lnSpc>
                 <a:spcPct val="120000"/>
               </a:lnSpc>
               <a:buNone/>
             </a:pPr>
             <a:r>
-              <a:rPr lang="en-US" sz="2200" dirty="0">
+              <a:rPr lang="en-US" sz="1800" dirty="0">
                 <a:solidFill>
                   <a:srgbClr val="0F172A"/>
                 </a:solidFill>
@@ -11457,22 +11866,22 @@
                 <a:ea typeface="Pretendard" pitchFamily="34" charset="-122"/>
                 <a:cs typeface="Pretendard" pitchFamily="34" charset="-120"/>
               </a:rPr>
-              <a:t>Icon and Text Aside</a:t>
+              <a:t>10  Icon and Text Aside</a:t>
             </a:r>
-            <a:endParaRPr lang="en-US" sz="2200" dirty="0"/>
+            <a:endParaRPr lang="en-US" sz="1800" dirty="0"/>
           </a:p>
         </p:txBody>
       </p:sp>
       <p:sp>
         <p:nvSpPr>
-          <p:cNvPr id="17" name="Text 15"/>
+          <p:cNvPr id="31" name="Text 29"/>
           <p:cNvSpPr txBox="1"/>
           <p:nvPr/>
         </p:nvSpPr>
         <p:spPr>
           <a:xfrm>
-            <a:off x="987552" y="5123688"/>
-            <a:ext cx="10094976" cy="355092"/>
+            <a:off x="6492240" y="4690872"/>
+            <a:ext cx="4645152" cy="475488"/>
           </a:xfrm>
           <a:prstGeom prst="rect">
             <a:avLst/>
@@ -11484,14 +11893,14 @@
           <a:bodyPr wrap="square" lIns="0" tIns="25400" rIns="25400" bIns="0" rtlCol="0" anchor="ctr"/>
           <a:lstStyle/>
           <a:p>
-            <a:pPr algn="l" indent="0" marL="0">
+            <a:pPr algn="ctr" indent="0" marL="0">
               <a:lnSpc>
                 <a:spcPct val="120000"/>
               </a:lnSpc>
               <a:buNone/>
             </a:pPr>
             <a:r>
-              <a:rPr lang="en-US" sz="2200" dirty="0">
+              <a:rPr lang="en-US" sz="1800" dirty="0">
                 <a:solidFill>
                   <a:srgbClr val="0F172A"/>
                 </a:solidFill>
@@ -11499,22 +11908,22 @@
                 <a:ea typeface="Pretendard" pitchFamily="34" charset="-122"/>
                 <a:cs typeface="Pretendard" pitchFamily="34" charset="-120"/>
               </a:rPr>
-              <a:t>Overflow Guard</a:t>
+              <a:t>11  Overflow Guard</a:t>
             </a:r>
-            <a:endParaRPr lang="en-US" sz="2200" dirty="0"/>
+            <a:endParaRPr lang="en-US" sz="1800" dirty="0"/>
           </a:p>
         </p:txBody>
       </p:sp>
       <p:sp>
         <p:nvSpPr>
-          <p:cNvPr id="18" name="Text 16"/>
+          <p:cNvPr id="32" name="Text 30"/>
           <p:cNvSpPr txBox="1"/>
           <p:nvPr/>
         </p:nvSpPr>
         <p:spPr>
           <a:xfrm>
-            <a:off x="987552" y="5478780"/>
-            <a:ext cx="10094976" cy="355092"/>
+            <a:off x="6492240" y="5486400"/>
+            <a:ext cx="4645152" cy="475488"/>
           </a:xfrm>
           <a:prstGeom prst="rect">
             <a:avLst/>
@@ -11526,14 +11935,14 @@
           <a:bodyPr wrap="square" lIns="0" tIns="25400" rIns="25400" bIns="0" rtlCol="0" anchor="ctr"/>
           <a:lstStyle/>
           <a:p>
-            <a:pPr algn="l" indent="0" marL="0">
+            <a:pPr algn="ctr" indent="0" marL="0">
               <a:lnSpc>
                 <a:spcPct val="120000"/>
               </a:lnSpc>
               <a:buNone/>
             </a:pPr>
             <a:r>
-              <a:rPr lang="en-US" sz="2200" dirty="0">
+              <a:rPr lang="en-US" sz="1800" dirty="0">
                 <a:solidFill>
                   <a:srgbClr val="0F172A"/>
                 </a:solidFill>
@@ -11541,9 +11950,9 @@
                 <a:ea typeface="Pretendard" pitchFamily="34" charset="-122"/>
                 <a:cs typeface="Pretendard" pitchFamily="34" charset="-120"/>
               </a:rPr>
-              <a:t>Actions Output Review</a:t>
+              <a:t>12  Actions Output Review</a:t>
             </a:r>
-            <a:endParaRPr lang="en-US" sz="2200" dirty="0"/>
+            <a:endParaRPr lang="en-US" sz="1800" dirty="0"/>
           </a:p>
         </p:txBody>
       </p:sp>
@@ -12126,8 +12535,37 @@
         </p:nvSpPr>
         <p:spPr>
           <a:xfrm>
-            <a:off x="914400" y="1417320"/>
-            <a:ext cx="73152" cy="868680"/>
+            <a:off x="786384" y="1956816"/>
+            <a:ext cx="32004" cy="3483864"/>
+          </a:xfrm>
+          <a:prstGeom prst="rect">
+            <a:avLst/>
+          </a:prstGeom>
+          <a:solidFill>
+            <a:srgbClr val="BFDBFE">
+              <a:alpha val="80000"/>
+            </a:srgbClr>
+          </a:solidFill>
+          <a:ln w="12700">
+            <a:solidFill>
+              <a:srgbClr val="BFDBFE">
+                <a:alpha val="0"/>
+              </a:srgbClr>
+            </a:solidFill>
+            <a:prstDash val="solid"/>
+          </a:ln>
+        </p:spPr>
+      </p:sp>
+      <p:sp>
+        <p:nvSpPr>
+          <p:cNvPr id="6" name="Shape 4"/>
+          <p:cNvSpPr/>
+          <p:nvPr/>
+        </p:nvSpPr>
+        <p:spPr>
+          <a:xfrm>
+            <a:off x="914400" y="1865376"/>
+            <a:ext cx="73152" cy="1024128"/>
           </a:xfrm>
           <a:prstGeom prst="rect">
             <a:avLst/>
@@ -12147,14 +12585,14 @@
       </p:sp>
       <p:sp>
         <p:nvSpPr>
-          <p:cNvPr id="6" name="Shape 4"/>
-          <p:cNvSpPr/>
-          <p:nvPr/>
-        </p:nvSpPr>
-        <p:spPr>
-          <a:xfrm>
-            <a:off x="914400" y="2560320"/>
-            <a:ext cx="73152" cy="868680"/>
+          <p:cNvPr id="7" name="Shape 5"/>
+          <p:cNvSpPr/>
+          <p:nvPr/>
+        </p:nvSpPr>
+        <p:spPr>
+          <a:xfrm>
+            <a:off x="914400" y="3191256"/>
+            <a:ext cx="73152" cy="1024128"/>
           </a:xfrm>
           <a:prstGeom prst="rect">
             <a:avLst/>
@@ -12174,14 +12612,14 @@
       </p:sp>
       <p:sp>
         <p:nvSpPr>
-          <p:cNvPr id="7" name="Shape 5"/>
-          <p:cNvSpPr/>
-          <p:nvPr/>
-        </p:nvSpPr>
-        <p:spPr>
-          <a:xfrm>
-            <a:off x="914400" y="3703320"/>
-            <a:ext cx="73152" cy="868680"/>
+          <p:cNvPr id="8" name="Shape 6"/>
+          <p:cNvSpPr/>
+          <p:nvPr/>
+        </p:nvSpPr>
+        <p:spPr>
+          <a:xfrm>
+            <a:off x="914400" y="4507992"/>
+            <a:ext cx="73152" cy="1024128"/>
           </a:xfrm>
           <a:prstGeom prst="rect">
             <a:avLst/>
@@ -12201,7 +12639,7 @@
       </p:sp>
       <p:pic>
         <p:nvPicPr>
-          <p:cNvPr id="8" name="Image 0" descr="preencoded.png">    </p:cNvPr>
+          <p:cNvPr id="9" name="Image 0" descr="preencoded.png">    </p:cNvPr>
           <p:cNvPicPr>
             <a:picLocks noChangeAspect="1"/>
           </p:cNvPicPr>
@@ -12221,8 +12659,8 @@
         </p:blipFill>
         <p:spPr>
           <a:xfrm>
-            <a:off x="914400" y="1417320"/>
-            <a:ext cx="10241280" cy="868680"/>
+            <a:off x="914400" y="1865376"/>
+            <a:ext cx="10241280" cy="1024128"/>
           </a:xfrm>
           <a:prstGeom prst="rect">
             <a:avLst/>
@@ -12231,14 +12669,14 @@
       </p:pic>
       <p:sp>
         <p:nvSpPr>
-          <p:cNvPr id="9" name="Shape 6"/>
-          <p:cNvSpPr/>
-          <p:nvPr/>
-        </p:nvSpPr>
-        <p:spPr>
-          <a:xfrm>
-            <a:off x="914400" y="1417320"/>
-            <a:ext cx="10241280" cy="868680"/>
+          <p:cNvPr id="10" name="Shape 7"/>
+          <p:cNvSpPr/>
+          <p:nvPr/>
+        </p:nvSpPr>
+        <p:spPr>
+          <a:xfrm>
+            <a:off x="914400" y="1865376"/>
+            <a:ext cx="10241280" cy="1024128"/>
           </a:xfrm>
           <a:prstGeom prst="rect">
             <a:avLst/>
@@ -12267,7 +12705,7 @@
       </p:sp>
       <p:pic>
         <p:nvPicPr>
-          <p:cNvPr id="10" name="Image 1" descr="preencoded.png">    </p:cNvPr>
+          <p:cNvPr id="11" name="Image 1" descr="preencoded.png">    </p:cNvPr>
           <p:cNvPicPr>
             <a:picLocks noChangeAspect="1"/>
           </p:cNvPicPr>
@@ -12287,8 +12725,8 @@
         </p:blipFill>
         <p:spPr>
           <a:xfrm>
-            <a:off x="914400" y="2560320"/>
-            <a:ext cx="10241280" cy="868680"/>
+            <a:off x="914400" y="3191256"/>
+            <a:ext cx="10241280" cy="1024128"/>
           </a:xfrm>
           <a:prstGeom prst="rect">
             <a:avLst/>
@@ -12297,14 +12735,14 @@
       </p:pic>
       <p:sp>
         <p:nvSpPr>
-          <p:cNvPr id="11" name="Shape 7"/>
-          <p:cNvSpPr/>
-          <p:nvPr/>
-        </p:nvSpPr>
-        <p:spPr>
-          <a:xfrm>
-            <a:off x="914400" y="2560320"/>
-            <a:ext cx="10241280" cy="868680"/>
+          <p:cNvPr id="12" name="Shape 8"/>
+          <p:cNvSpPr/>
+          <p:nvPr/>
+        </p:nvSpPr>
+        <p:spPr>
+          <a:xfrm>
+            <a:off x="914400" y="3191256"/>
+            <a:ext cx="10241280" cy="1024128"/>
           </a:xfrm>
           <a:prstGeom prst="rect">
             <a:avLst/>
@@ -12333,7 +12771,7 @@
       </p:sp>
       <p:pic>
         <p:nvPicPr>
-          <p:cNvPr id="12" name="Image 2" descr="preencoded.png">    </p:cNvPr>
+          <p:cNvPr id="13" name="Image 2" descr="preencoded.png">    </p:cNvPr>
           <p:cNvPicPr>
             <a:picLocks noChangeAspect="1"/>
           </p:cNvPicPr>
@@ -12353,8 +12791,8 @@
         </p:blipFill>
         <p:spPr>
           <a:xfrm>
-            <a:off x="914400" y="3703320"/>
-            <a:ext cx="10241280" cy="868680"/>
+            <a:off x="914400" y="4507992"/>
+            <a:ext cx="10241280" cy="1024128"/>
           </a:xfrm>
           <a:prstGeom prst="rect">
             <a:avLst/>
@@ -12363,14 +12801,14 @@
       </p:pic>
       <p:sp>
         <p:nvSpPr>
-          <p:cNvPr id="13" name="Shape 8"/>
-          <p:cNvSpPr/>
-          <p:nvPr/>
-        </p:nvSpPr>
-        <p:spPr>
-          <a:xfrm>
-            <a:off x="914400" y="3703320"/>
-            <a:ext cx="10241280" cy="868680"/>
+          <p:cNvPr id="14" name="Shape 9"/>
+          <p:cNvSpPr/>
+          <p:nvPr/>
+        </p:nvSpPr>
+        <p:spPr>
+          <a:xfrm>
+            <a:off x="914400" y="4507992"/>
+            <a:ext cx="10241280" cy="1024128"/>
           </a:xfrm>
           <a:prstGeom prst="rect">
             <a:avLst/>
@@ -12399,7 +12837,7 @@
       </p:sp>
       <p:sp>
         <p:nvSpPr>
-          <p:cNvPr id="14" name="Text 9"/>
+          <p:cNvPr id="15" name="Text 10"/>
           <p:cNvSpPr txBox="1"/>
           <p:nvPr/>
         </p:nvSpPr>
@@ -12441,18 +12879,18 @@
       </p:sp>
       <p:sp>
         <p:nvSpPr>
-          <p:cNvPr id="15" name="Shape 10"/>
-          <p:cNvSpPr/>
-          <p:nvPr/>
-        </p:nvSpPr>
-        <p:spPr>
-          <a:xfrm>
-            <a:off x="1097280" y="1623060"/>
-            <a:ext cx="457200" cy="457200"/>
+          <p:cNvPr id="16" name="Shape 11"/>
+          <p:cNvSpPr/>
+          <p:nvPr/>
+        </p:nvSpPr>
+        <p:spPr>
+          <a:xfrm>
+            <a:off x="1097280" y="2140428"/>
+            <a:ext cx="474025" cy="474025"/>
           </a:xfrm>
           <a:prstGeom prst="roundRect">
             <a:avLst>
-              <a:gd name="adj" fmla="val 8000"/>
+              <a:gd name="adj" fmla="val 7716"/>
             </a:avLst>
           </a:prstGeom>
           <a:solidFill>
@@ -12468,7 +12906,7 @@
       </p:sp>
       <p:pic>
         <p:nvPicPr>
-          <p:cNvPr id="16" name="Image 3" descr="flow icon from tabler-icons (MIT)">    </p:cNvPr>
+          <p:cNvPr id="17" name="Image 3" descr="flow icon from tabler-icons (MIT)">    </p:cNvPr>
           <p:cNvPicPr>
             <a:picLocks noChangeAspect="1"/>
           </p:cNvPicPr>
@@ -12488,8 +12926,8 @@
         </p:blipFill>
         <p:spPr>
           <a:xfrm>
-            <a:off x="1170432" y="1696212"/>
-            <a:ext cx="310896" cy="310896"/>
+            <a:off x="1170432" y="2213580"/>
+            <a:ext cx="327721" cy="327721"/>
           </a:xfrm>
           <a:prstGeom prst="rect">
             <a:avLst/>
@@ -12498,14 +12936,14 @@
       </p:pic>
       <p:sp>
         <p:nvSpPr>
-          <p:cNvPr id="17" name="Text 11"/>
+          <p:cNvPr id="18" name="Text 12"/>
           <p:cNvSpPr txBox="1"/>
           <p:nvPr/>
         </p:nvSpPr>
         <p:spPr>
           <a:xfrm>
-            <a:off x="1682496" y="1508760"/>
-            <a:ext cx="9272016" cy="685800"/>
+            <a:off x="1699321" y="1957548"/>
+            <a:ext cx="9255191" cy="839785"/>
           </a:xfrm>
           <a:prstGeom prst="rect">
             <a:avLst/>
@@ -12557,18 +12995,18 @@
       </p:sp>
       <p:sp>
         <p:nvSpPr>
-          <p:cNvPr id="18" name="Shape 12"/>
-          <p:cNvSpPr/>
-          <p:nvPr/>
-        </p:nvSpPr>
-        <p:spPr>
-          <a:xfrm>
-            <a:off x="1097280" y="2766060"/>
-            <a:ext cx="457200" cy="457200"/>
+          <p:cNvPr id="19" name="Shape 13"/>
+          <p:cNvSpPr/>
+          <p:nvPr/>
+        </p:nvSpPr>
+        <p:spPr>
+          <a:xfrm>
+            <a:off x="1097280" y="3466308"/>
+            <a:ext cx="474025" cy="474025"/>
           </a:xfrm>
           <a:prstGeom prst="roundRect">
             <a:avLst>
-              <a:gd name="adj" fmla="val 8000"/>
+              <a:gd name="adj" fmla="val 7716"/>
             </a:avLst>
           </a:prstGeom>
           <a:solidFill>
@@ -12584,7 +13022,7 @@
       </p:sp>
       <p:pic>
         <p:nvPicPr>
-          <p:cNvPr id="19" name="Image 4" descr="verified icon from tabler-icons (MIT)">    </p:cNvPr>
+          <p:cNvPr id="20" name="Image 4" descr="verified icon from tabler-icons (MIT)">    </p:cNvPr>
           <p:cNvPicPr>
             <a:picLocks noChangeAspect="1"/>
           </p:cNvPicPr>
@@ -12604,8 +13042,8 @@
         </p:blipFill>
         <p:spPr>
           <a:xfrm>
-            <a:off x="1170432" y="2839212"/>
-            <a:ext cx="310896" cy="310896"/>
+            <a:off x="1170432" y="3539460"/>
+            <a:ext cx="327721" cy="327721"/>
           </a:xfrm>
           <a:prstGeom prst="rect">
             <a:avLst/>
@@ -12614,14 +13052,14 @@
       </p:pic>
       <p:sp>
         <p:nvSpPr>
-          <p:cNvPr id="20" name="Text 13"/>
+          <p:cNvPr id="21" name="Text 14"/>
           <p:cNvSpPr txBox="1"/>
           <p:nvPr/>
         </p:nvSpPr>
         <p:spPr>
           <a:xfrm>
-            <a:off x="1682496" y="2651760"/>
-            <a:ext cx="9272016" cy="685800"/>
+            <a:off x="1699321" y="3283428"/>
+            <a:ext cx="9255191" cy="839785"/>
           </a:xfrm>
           <a:prstGeom prst="rect">
             <a:avLst/>
@@ -12673,18 +13111,18 @@
       </p:sp>
       <p:sp>
         <p:nvSpPr>
-          <p:cNvPr id="21" name="Shape 14"/>
-          <p:cNvSpPr/>
-          <p:nvPr/>
-        </p:nvSpPr>
-        <p:spPr>
-          <a:xfrm>
-            <a:off x="1097280" y="3909060"/>
-            <a:ext cx="457200" cy="457200"/>
+          <p:cNvPr id="22" name="Shape 15"/>
+          <p:cNvSpPr/>
+          <p:nvPr/>
+        </p:nvSpPr>
+        <p:spPr>
+          <a:xfrm>
+            <a:off x="1097280" y="4783044"/>
+            <a:ext cx="474025" cy="474025"/>
           </a:xfrm>
           <a:prstGeom prst="roundRect">
             <a:avLst>
-              <a:gd name="adj" fmla="val 8000"/>
+              <a:gd name="adj" fmla="val 7716"/>
             </a:avLst>
           </a:prstGeom>
           <a:solidFill>
@@ -12700,7 +13138,7 @@
       </p:sp>
       <p:pic>
         <p:nvPicPr>
-          <p:cNvPr id="22" name="Image 5" descr="spark icon from tabler-icons (MIT)">    </p:cNvPr>
+          <p:cNvPr id="23" name="Image 5" descr="spark icon from tabler-icons (MIT)">    </p:cNvPr>
           <p:cNvPicPr>
             <a:picLocks noChangeAspect="1"/>
           </p:cNvPicPr>
@@ -12720,8 +13158,8 @@
         </p:blipFill>
         <p:spPr>
           <a:xfrm>
-            <a:off x="1170432" y="3982212"/>
-            <a:ext cx="310896" cy="310896"/>
+            <a:off x="1170432" y="4856196"/>
+            <a:ext cx="327721" cy="327721"/>
           </a:xfrm>
           <a:prstGeom prst="rect">
             <a:avLst/>
@@ -12730,14 +13168,14 @@
       </p:pic>
       <p:sp>
         <p:nvSpPr>
-          <p:cNvPr id="23" name="Text 15"/>
+          <p:cNvPr id="24" name="Text 16"/>
           <p:cNvSpPr txBox="1"/>
           <p:nvPr/>
         </p:nvSpPr>
         <p:spPr>
           <a:xfrm>
-            <a:off x="1682496" y="3794760"/>
-            <a:ext cx="9272016" cy="685800"/>
+            <a:off x="1699321" y="4600164"/>
+            <a:ext cx="9255191" cy="839785"/>
           </a:xfrm>
           <a:prstGeom prst="rect">
             <a:avLst/>
@@ -13235,8 +13673,37 @@
         </p:nvSpPr>
         <p:spPr>
           <a:xfrm>
-            <a:off x="914400" y="1417320"/>
-            <a:ext cx="73152" cy="868680"/>
+            <a:off x="786384" y="1956816"/>
+            <a:ext cx="32004" cy="3483864"/>
+          </a:xfrm>
+          <a:prstGeom prst="rect">
+            <a:avLst/>
+          </a:prstGeom>
+          <a:solidFill>
+            <a:srgbClr val="BFDBFE">
+              <a:alpha val="80000"/>
+            </a:srgbClr>
+          </a:solidFill>
+          <a:ln w="12700">
+            <a:solidFill>
+              <a:srgbClr val="BFDBFE">
+                <a:alpha val="0"/>
+              </a:srgbClr>
+            </a:solidFill>
+            <a:prstDash val="solid"/>
+          </a:ln>
+        </p:spPr>
+      </p:sp>
+      <p:sp>
+        <p:nvSpPr>
+          <p:cNvPr id="6" name="Shape 4"/>
+          <p:cNvSpPr/>
+          <p:nvPr/>
+        </p:nvSpPr>
+        <p:spPr>
+          <a:xfrm>
+            <a:off x="914400" y="1865376"/>
+            <a:ext cx="73152" cy="1024128"/>
           </a:xfrm>
           <a:prstGeom prst="rect">
             <a:avLst/>
@@ -13256,14 +13723,14 @@
       </p:sp>
       <p:sp>
         <p:nvSpPr>
-          <p:cNvPr id="6" name="Shape 4"/>
-          <p:cNvSpPr/>
-          <p:nvPr/>
-        </p:nvSpPr>
-        <p:spPr>
-          <a:xfrm>
-            <a:off x="914400" y="2560320"/>
-            <a:ext cx="73152" cy="868680"/>
+          <p:cNvPr id="7" name="Shape 5"/>
+          <p:cNvSpPr/>
+          <p:nvPr/>
+        </p:nvSpPr>
+        <p:spPr>
+          <a:xfrm>
+            <a:off x="914400" y="3191256"/>
+            <a:ext cx="73152" cy="1024128"/>
           </a:xfrm>
           <a:prstGeom prst="rect">
             <a:avLst/>
@@ -13283,14 +13750,14 @@
       </p:sp>
       <p:sp>
         <p:nvSpPr>
-          <p:cNvPr id="7" name="Shape 5"/>
-          <p:cNvSpPr/>
-          <p:nvPr/>
-        </p:nvSpPr>
-        <p:spPr>
-          <a:xfrm>
-            <a:off x="914400" y="3703320"/>
-            <a:ext cx="73152" cy="868680"/>
+          <p:cNvPr id="8" name="Shape 6"/>
+          <p:cNvSpPr/>
+          <p:nvPr/>
+        </p:nvSpPr>
+        <p:spPr>
+          <a:xfrm>
+            <a:off x="914400" y="4507992"/>
+            <a:ext cx="73152" cy="1024128"/>
           </a:xfrm>
           <a:prstGeom prst="rect">
             <a:avLst/>
@@ -13310,7 +13777,7 @@
       </p:sp>
       <p:pic>
         <p:nvPicPr>
-          <p:cNvPr id="8" name="Image 0" descr="preencoded.png">    </p:cNvPr>
+          <p:cNvPr id="9" name="Image 0" descr="preencoded.png">    </p:cNvPr>
           <p:cNvPicPr>
             <a:picLocks noChangeAspect="1"/>
           </p:cNvPicPr>
@@ -13330,8 +13797,8 @@
         </p:blipFill>
         <p:spPr>
           <a:xfrm>
-            <a:off x="914400" y="1417320"/>
-            <a:ext cx="10241280" cy="868680"/>
+            <a:off x="914400" y="1865376"/>
+            <a:ext cx="10241280" cy="1024128"/>
           </a:xfrm>
           <a:prstGeom prst="rect">
             <a:avLst/>
@@ -13340,14 +13807,14 @@
       </p:pic>
       <p:sp>
         <p:nvSpPr>
-          <p:cNvPr id="9" name="Shape 6"/>
-          <p:cNvSpPr/>
-          <p:nvPr/>
-        </p:nvSpPr>
-        <p:spPr>
-          <a:xfrm>
-            <a:off x="914400" y="1417320"/>
-            <a:ext cx="10241280" cy="868680"/>
+          <p:cNvPr id="10" name="Shape 7"/>
+          <p:cNvSpPr/>
+          <p:nvPr/>
+        </p:nvSpPr>
+        <p:spPr>
+          <a:xfrm>
+            <a:off x="914400" y="1865376"/>
+            <a:ext cx="10241280" cy="1024128"/>
           </a:xfrm>
           <a:prstGeom prst="rect">
             <a:avLst/>
@@ -13376,7 +13843,7 @@
       </p:sp>
       <p:pic>
         <p:nvPicPr>
-          <p:cNvPr id="10" name="Image 1" descr="preencoded.png">    </p:cNvPr>
+          <p:cNvPr id="11" name="Image 1" descr="preencoded.png">    </p:cNvPr>
           <p:cNvPicPr>
             <a:picLocks noChangeAspect="1"/>
           </p:cNvPicPr>
@@ -13396,8 +13863,8 @@
         </p:blipFill>
         <p:spPr>
           <a:xfrm>
-            <a:off x="914400" y="2560320"/>
-            <a:ext cx="10241280" cy="868680"/>
+            <a:off x="914400" y="3191256"/>
+            <a:ext cx="10241280" cy="1024128"/>
           </a:xfrm>
           <a:prstGeom prst="rect">
             <a:avLst/>
@@ -13406,14 +13873,14 @@
       </p:pic>
       <p:sp>
         <p:nvSpPr>
-          <p:cNvPr id="11" name="Shape 7"/>
-          <p:cNvSpPr/>
-          <p:nvPr/>
-        </p:nvSpPr>
-        <p:spPr>
-          <a:xfrm>
-            <a:off x="914400" y="2560320"/>
-            <a:ext cx="10241280" cy="868680"/>
+          <p:cNvPr id="12" name="Shape 8"/>
+          <p:cNvSpPr/>
+          <p:nvPr/>
+        </p:nvSpPr>
+        <p:spPr>
+          <a:xfrm>
+            <a:off x="914400" y="3191256"/>
+            <a:ext cx="10241280" cy="1024128"/>
           </a:xfrm>
           <a:prstGeom prst="rect">
             <a:avLst/>
@@ -13442,7 +13909,7 @@
       </p:sp>
       <p:pic>
         <p:nvPicPr>
-          <p:cNvPr id="12" name="Image 2" descr="preencoded.png">    </p:cNvPr>
+          <p:cNvPr id="13" name="Image 2" descr="preencoded.png">    </p:cNvPr>
           <p:cNvPicPr>
             <a:picLocks noChangeAspect="1"/>
           </p:cNvPicPr>
@@ -13462,8 +13929,8 @@
         </p:blipFill>
         <p:spPr>
           <a:xfrm>
-            <a:off x="914400" y="3703320"/>
-            <a:ext cx="10241280" cy="868680"/>
+            <a:off x="914400" y="4507992"/>
+            <a:ext cx="10241280" cy="1024128"/>
           </a:xfrm>
           <a:prstGeom prst="rect">
             <a:avLst/>
@@ -13472,14 +13939,14 @@
       </p:pic>
       <p:sp>
         <p:nvSpPr>
-          <p:cNvPr id="13" name="Shape 8"/>
-          <p:cNvSpPr/>
-          <p:nvPr/>
-        </p:nvSpPr>
-        <p:spPr>
-          <a:xfrm>
-            <a:off x="914400" y="3703320"/>
-            <a:ext cx="10241280" cy="868680"/>
+          <p:cNvPr id="14" name="Shape 9"/>
+          <p:cNvSpPr/>
+          <p:nvPr/>
+        </p:nvSpPr>
+        <p:spPr>
+          <a:xfrm>
+            <a:off x="914400" y="4507992"/>
+            <a:ext cx="10241280" cy="1024128"/>
           </a:xfrm>
           <a:prstGeom prst="rect">
             <a:avLst/>
@@ -13508,7 +13975,7 @@
       </p:sp>
       <p:sp>
         <p:nvSpPr>
-          <p:cNvPr id="14" name="Text 9"/>
+          <p:cNvPr id="15" name="Text 10"/>
           <p:cNvSpPr txBox="1"/>
           <p:nvPr/>
         </p:nvSpPr>
@@ -13550,18 +14017,18 @@
       </p:sp>
       <p:sp>
         <p:nvSpPr>
-          <p:cNvPr id="15" name="Shape 10"/>
-          <p:cNvSpPr/>
-          <p:nvPr/>
-        </p:nvSpPr>
-        <p:spPr>
-          <a:xfrm>
-            <a:off x="1097280" y="1623060"/>
-            <a:ext cx="457200" cy="457200"/>
+          <p:cNvPr id="16" name="Shape 11"/>
+          <p:cNvSpPr/>
+          <p:nvPr/>
+        </p:nvSpPr>
+        <p:spPr>
+          <a:xfrm>
+            <a:off x="1097280" y="2140428"/>
+            <a:ext cx="474025" cy="474025"/>
           </a:xfrm>
           <a:prstGeom prst="roundRect">
             <a:avLst>
-              <a:gd name="adj" fmla="val 8000"/>
+              <a:gd name="adj" fmla="val 7716"/>
             </a:avLst>
           </a:prstGeom>
           <a:solidFill>
@@ -13577,7 +14044,7 @@
       </p:sp>
       <p:pic>
         <p:nvPicPr>
-          <p:cNvPr id="16" name="Image 3" descr="flow icon from tabler-icons (MIT)">    </p:cNvPr>
+          <p:cNvPr id="17" name="Image 3" descr="flow icon from tabler-icons (MIT)">    </p:cNvPr>
           <p:cNvPicPr>
             <a:picLocks noChangeAspect="1"/>
           </p:cNvPicPr>
@@ -13597,8 +14064,8 @@
         </p:blipFill>
         <p:spPr>
           <a:xfrm>
-            <a:off x="1170432" y="1696212"/>
-            <a:ext cx="310896" cy="310896"/>
+            <a:off x="1170432" y="2213580"/>
+            <a:ext cx="327721" cy="327721"/>
           </a:xfrm>
           <a:prstGeom prst="rect">
             <a:avLst/>
@@ -13607,14 +14074,14 @@
       </p:pic>
       <p:sp>
         <p:nvSpPr>
-          <p:cNvPr id="17" name="Text 11"/>
+          <p:cNvPr id="18" name="Text 12"/>
           <p:cNvSpPr txBox="1"/>
           <p:nvPr/>
         </p:nvSpPr>
         <p:spPr>
           <a:xfrm>
-            <a:off x="1682496" y="1508760"/>
-            <a:ext cx="9272016" cy="685800"/>
+            <a:off x="1699321" y="1957548"/>
+            <a:ext cx="9255191" cy="839785"/>
           </a:xfrm>
           <a:prstGeom prst="rect">
             <a:avLst/>
@@ -13641,7 +14108,7 @@
                 <a:ea typeface="Pretendard" pitchFamily="34" charset="-122"/>
                 <a:cs typeface="Pretendard" pitchFamily="34" charset="-120"/>
               </a:rPr>
-              <a:t>Plain / clean</a:t>
+              <a:t>Clean / minimalism</a:t>
             </a:r>
             <a:pPr algn="l" indent="0" marL="0">
               <a:lnSpc>
@@ -13658,7 +14125,7 @@
                 <a:ea typeface="Pretendard" pitchFamily="34" charset="-122"/>
                 <a:cs typeface="Pretendard" pitchFamily="34" charset="-120"/>
               </a:rPr>
-              <a:t>  low-decoration baselines.</a:t>
+              <a:t>  restrained structural baselines.</a:t>
             </a:r>
             <a:endParaRPr lang="en-US" sz="2200" dirty="0"/>
           </a:p>
@@ -13666,18 +14133,18 @@
       </p:sp>
       <p:sp>
         <p:nvSpPr>
-          <p:cNvPr id="18" name="Shape 12"/>
-          <p:cNvSpPr/>
-          <p:nvPr/>
-        </p:nvSpPr>
-        <p:spPr>
-          <a:xfrm>
-            <a:off x="1097280" y="2766060"/>
-            <a:ext cx="457200" cy="457200"/>
+          <p:cNvPr id="19" name="Shape 13"/>
+          <p:cNvSpPr/>
+          <p:nvPr/>
+        </p:nvSpPr>
+        <p:spPr>
+          <a:xfrm>
+            <a:off x="1097280" y="3466308"/>
+            <a:ext cx="474025" cy="474025"/>
           </a:xfrm>
           <a:prstGeom prst="roundRect">
             <a:avLst>
-              <a:gd name="adj" fmla="val 8000"/>
+              <a:gd name="adj" fmla="val 7716"/>
             </a:avLst>
           </a:prstGeom>
           <a:solidFill>
@@ -13693,7 +14160,7 @@
       </p:sp>
       <p:pic>
         <p:nvPicPr>
-          <p:cNvPr id="19" name="Image 4" descr="verified icon from tabler-icons (MIT)">    </p:cNvPr>
+          <p:cNvPr id="20" name="Image 4" descr="verified icon from tabler-icons (MIT)">    </p:cNvPr>
           <p:cNvPicPr>
             <a:picLocks noChangeAspect="1"/>
           </p:cNvPicPr>
@@ -13713,8 +14180,8 @@
         </p:blipFill>
         <p:spPr>
           <a:xfrm>
-            <a:off x="1170432" y="2839212"/>
-            <a:ext cx="310896" cy="310896"/>
+            <a:off x="1170432" y="3539460"/>
+            <a:ext cx="327721" cy="327721"/>
           </a:xfrm>
           <a:prstGeom prst="rect">
             <a:avLst/>
@@ -13723,14 +14190,14 @@
       </p:pic>
       <p:sp>
         <p:nvSpPr>
-          <p:cNvPr id="20" name="Text 13"/>
+          <p:cNvPr id="21" name="Text 14"/>
           <p:cNvSpPr txBox="1"/>
           <p:nvPr/>
         </p:nvSpPr>
         <p:spPr>
           <a:xfrm>
-            <a:off x="1682496" y="2651760"/>
-            <a:ext cx="9272016" cy="685800"/>
+            <a:off x="1699321" y="3283428"/>
+            <a:ext cx="9255191" cy="839785"/>
           </a:xfrm>
           <a:prstGeom prst="rect">
             <a:avLst/>
@@ -13782,18 +14249,18 @@
       </p:sp>
       <p:sp>
         <p:nvSpPr>
-          <p:cNvPr id="21" name="Shape 14"/>
-          <p:cNvSpPr/>
-          <p:nvPr/>
-        </p:nvSpPr>
-        <p:spPr>
-          <a:xfrm>
-            <a:off x="1097280" y="3909060"/>
-            <a:ext cx="457200" cy="457200"/>
+          <p:cNvPr id="22" name="Shape 15"/>
+          <p:cNvSpPr/>
+          <p:nvPr/>
+        </p:nvSpPr>
+        <p:spPr>
+          <a:xfrm>
+            <a:off x="1097280" y="4783044"/>
+            <a:ext cx="474025" cy="474025"/>
           </a:xfrm>
           <a:prstGeom prst="roundRect">
             <a:avLst>
-              <a:gd name="adj" fmla="val 8000"/>
+              <a:gd name="adj" fmla="val 7716"/>
             </a:avLst>
           </a:prstGeom>
           <a:solidFill>
@@ -13809,7 +14276,7 @@
       </p:sp>
       <p:pic>
         <p:nvPicPr>
-          <p:cNvPr id="22" name="Image 5" descr="spark icon from tabler-icons (MIT)">    </p:cNvPr>
+          <p:cNvPr id="23" name="Image 5" descr="spark icon from tabler-icons (MIT)">    </p:cNvPr>
           <p:cNvPicPr>
             <a:picLocks noChangeAspect="1"/>
           </p:cNvPicPr>
@@ -13829,8 +14296,8 @@
         </p:blipFill>
         <p:spPr>
           <a:xfrm>
-            <a:off x="1170432" y="3982212"/>
-            <a:ext cx="310896" cy="310896"/>
+            <a:off x="1170432" y="4856196"/>
+            <a:ext cx="327721" cy="327721"/>
           </a:xfrm>
           <a:prstGeom prst="rect">
             <a:avLst/>
@@ -13839,14 +14306,14 @@
       </p:pic>
       <p:sp>
         <p:nvSpPr>
-          <p:cNvPr id="23" name="Text 15"/>
+          <p:cNvPr id="24" name="Text 16"/>
           <p:cNvSpPr txBox="1"/>
           <p:nvPr/>
         </p:nvSpPr>
         <p:spPr>
           <a:xfrm>
-            <a:off x="1682496" y="3794760"/>
-            <a:ext cx="9272016" cy="685800"/>
+            <a:off x="1699321" y="4600164"/>
+            <a:ext cx="9255191" cy="839785"/>
           </a:xfrm>
           <a:prstGeom prst="rect">
             <a:avLst/>

--- a/docs/theme-preview/pptx/executive.pptx
+++ b/docs/theme-preview/pptx/executive.pptx
@@ -8653,7 +8653,7 @@
       </p:sp>
       <p:pic>
         <p:nvPicPr>
-          <p:cNvPr id="19" name="Image 4" descr="flow icon from tabler-icons (MIT)">    </p:cNvPr>
+          <p:cNvPr id="19" name="Image 4" descr="article icon from tabler-icons (MIT)">    </p:cNvPr>
           <p:cNvPicPr>
             <a:picLocks noChangeAspect="1"/>
           </p:cNvPicPr>
@@ -8769,7 +8769,7 @@
       </p:sp>
       <p:pic>
         <p:nvPicPr>
-          <p:cNvPr id="22" name="Image 5" descr="verified icon from tabler-icons (MIT)">    </p:cNvPr>
+          <p:cNvPr id="22" name="Image 5" descr="article icon from tabler-icons (MIT)">    </p:cNvPr>
           <p:cNvPicPr>
             <a:picLocks noChangeAspect="1"/>
           </p:cNvPicPr>
@@ -8885,7 +8885,7 @@
       </p:sp>
       <p:pic>
         <p:nvPicPr>
-          <p:cNvPr id="25" name="Image 6" descr="spark icon from tabler-icons (MIT)">    </p:cNvPr>
+          <p:cNvPr id="25" name="Image 6" descr="article icon from tabler-icons (MIT)">    </p:cNvPr>
           <p:cNvPicPr>
             <a:picLocks noChangeAspect="1"/>
           </p:cNvPicPr>
@@ -9001,7 +9001,7 @@
       </p:sp>
       <p:pic>
         <p:nvPicPr>
-          <p:cNvPr id="28" name="Image 7" descr="chart icon from tabler-icons (MIT)">    </p:cNvPr>
+          <p:cNvPr id="28" name="Image 7" descr="table icon from tabler-icons (MIT)">    </p:cNvPr>
           <p:cNvPicPr>
             <a:picLocks noChangeAspect="1"/>
           </p:cNvPicPr>
@@ -9644,7 +9644,7 @@
       </p:sp>
       <p:pic>
         <p:nvPicPr>
-          <p:cNvPr id="19" name="Image 4" descr="flow icon from tabler-icons (MIT)">    </p:cNvPr>
+          <p:cNvPr id="19" name="Image 4" descr="verified icon from tabler-icons (MIT)">    </p:cNvPr>
           <p:cNvPicPr>
             <a:picLocks noChangeAspect="1"/>
           </p:cNvPicPr>
@@ -9760,7 +9760,7 @@
       </p:sp>
       <p:pic>
         <p:nvPicPr>
-          <p:cNvPr id="22" name="Image 5" descr="verified icon from tabler-icons (MIT)">    </p:cNvPr>
+          <p:cNvPr id="22" name="Image 5" descr="table icon from tabler-icons (MIT)">    </p:cNvPr>
           <p:cNvPicPr>
             <a:picLocks noChangeAspect="1"/>
           </p:cNvPicPr>
@@ -9876,7 +9876,7 @@
       </p:sp>
       <p:pic>
         <p:nvPicPr>
-          <p:cNvPr id="25" name="Image 6" descr="spark icon from tabler-icons (MIT)">    </p:cNvPr>
+          <p:cNvPr id="25" name="Image 6" descr="article icon from tabler-icons (MIT)">    </p:cNvPr>
           <p:cNvPicPr>
             <a:picLocks noChangeAspect="1"/>
           </p:cNvPicPr>
@@ -9992,7 +9992,7 @@
       </p:sp>
       <p:pic>
         <p:nvPicPr>
-          <p:cNvPr id="28" name="Image 7" descr="chart icon from tabler-icons (MIT)">    </p:cNvPr>
+          <p:cNvPr id="28" name="Image 7" descr="article icon from tabler-icons (MIT)">    </p:cNvPr>
           <p:cNvPicPr>
             <a:picLocks noChangeAspect="1"/>
           </p:cNvPicPr>
@@ -12906,7 +12906,7 @@
       </p:sp>
       <p:pic>
         <p:nvPicPr>
-          <p:cNvPr id="17" name="Image 3" descr="flow icon from tabler-icons (MIT)">    </p:cNvPr>
+          <p:cNvPr id="17" name="Image 3" descr="article icon from tabler-icons (MIT)">    </p:cNvPr>
           <p:cNvPicPr>
             <a:picLocks noChangeAspect="1"/>
           </p:cNvPicPr>
@@ -13022,7 +13022,7 @@
       </p:sp>
       <p:pic>
         <p:nvPicPr>
-          <p:cNvPr id="20" name="Image 4" descr="verified icon from tabler-icons (MIT)">    </p:cNvPr>
+          <p:cNvPr id="20" name="Image 4" descr="chart icon from tabler-icons (MIT)">    </p:cNvPr>
           <p:cNvPicPr>
             <a:picLocks noChangeAspect="1"/>
           </p:cNvPicPr>
@@ -13138,7 +13138,7 @@
       </p:sp>
       <p:pic>
         <p:nvPicPr>
-          <p:cNvPr id="23" name="Image 5" descr="spark icon from tabler-icons (MIT)">    </p:cNvPr>
+          <p:cNvPr id="23" name="Image 5" descr="article icon from tabler-icons (MIT)">    </p:cNvPr>
           <p:cNvPicPr>
             <a:picLocks noChangeAspect="1"/>
           </p:cNvPicPr>
@@ -14044,7 +14044,7 @@
       </p:sp>
       <p:pic>
         <p:nvPicPr>
-          <p:cNvPr id="17" name="Image 3" descr="flow icon from tabler-icons (MIT)">    </p:cNvPr>
+          <p:cNvPr id="17" name="Image 3" descr="article icon from tabler-icons (MIT)">    </p:cNvPr>
           <p:cNvPicPr>
             <a:picLocks noChangeAspect="1"/>
           </p:cNvPicPr>
@@ -14160,7 +14160,7 @@
       </p:sp>
       <p:pic>
         <p:nvPicPr>
-          <p:cNvPr id="20" name="Image 4" descr="verified icon from tabler-icons (MIT)">    </p:cNvPr>
+          <p:cNvPr id="20" name="Image 4" descr="article icon from tabler-icons (MIT)">    </p:cNvPr>
           <p:cNvPicPr>
             <a:picLocks noChangeAspect="1"/>
           </p:cNvPicPr>
@@ -14276,7 +14276,7 @@
       </p:sp>
       <p:pic>
         <p:nvPicPr>
-          <p:cNvPr id="23" name="Image 5" descr="spark icon from tabler-icons (MIT)">    </p:cNvPr>
+          <p:cNvPr id="23" name="Image 5" descr="article icon from tabler-icons (MIT)">    </p:cNvPr>
           <p:cNvPicPr>
             <a:picLocks noChangeAspect="1"/>
           </p:cNvPicPr>
@@ -15246,7 +15246,7 @@
       </p:sp>
       <p:pic>
         <p:nvPicPr>
-          <p:cNvPr id="19" name="Image 4" descr="flow icon from tabler-icons (MIT)">    </p:cNvPr>
+          <p:cNvPr id="19" name="Image 4" descr="table icon from tabler-icons (MIT)">    </p:cNvPr>
           <p:cNvPicPr>
             <a:picLocks noChangeAspect="1"/>
           </p:cNvPicPr>
@@ -15362,7 +15362,7 @@
       </p:sp>
       <p:pic>
         <p:nvPicPr>
-          <p:cNvPr id="22" name="Image 5" descr="verified icon from tabler-icons (MIT)">    </p:cNvPr>
+          <p:cNvPr id="22" name="Image 5" descr="article icon from tabler-icons (MIT)">    </p:cNvPr>
           <p:cNvPicPr>
             <a:picLocks noChangeAspect="1"/>
           </p:cNvPicPr>
@@ -15478,7 +15478,7 @@
       </p:sp>
       <p:pic>
         <p:nvPicPr>
-          <p:cNvPr id="25" name="Image 6" descr="spark icon from tabler-icons (MIT)">    </p:cNvPr>
+          <p:cNvPr id="25" name="Image 6" descr="article icon from tabler-icons (MIT)">    </p:cNvPr>
           <p:cNvPicPr>
             <a:picLocks noChangeAspect="1"/>
           </p:cNvPicPr>
@@ -15594,7 +15594,7 @@
       </p:sp>
       <p:pic>
         <p:nvPicPr>
-          <p:cNvPr id="28" name="Image 7" descr="chart icon from tabler-icons (MIT)">    </p:cNvPr>
+          <p:cNvPr id="28" name="Image 7" descr="table icon from tabler-icons (MIT)">    </p:cNvPr>
           <p:cNvPicPr>
             <a:picLocks noChangeAspect="1"/>
           </p:cNvPicPr>

--- a/docs/theme-preview/pptx/executive.pptx
+++ b/docs/theme-preview/pptx/executive.pptx
@@ -11446,7 +11446,7 @@
                 <a:ea typeface="Pretendard" pitchFamily="34" charset="-122"/>
                 <a:cs typeface="Pretendard" pitchFamily="34" charset="-120"/>
               </a:rPr>
-              <a:t>목차</a:t>
+              <a:t>Agenda</a:t>
             </a:r>
             <a:endParaRPr lang="en-US" sz="3800" dirty="0"/>
           </a:p>

--- a/docs/theme-preview/pptx/executive.pptx
+++ b/docs/theme-preview/pptx/executive.pptx
@@ -3112,36 +3112,75 @@
           </a:ln>
         </p:spPr>
       </p:sp>
-      <p:sp>
-        <p:nvSpPr>
-          <p:cNvPr id="5" name="Shape 3"/>
-          <p:cNvSpPr/>
-          <p:nvPr/>
-        </p:nvSpPr>
-        <p:spPr>
-          <a:xfrm>
-            <a:off x="914400" y="1463040"/>
-            <a:ext cx="10241280" cy="73152"/>
-          </a:xfrm>
-          <a:prstGeom prst="rect">
-            <a:avLst/>
-          </a:prstGeom>
-          <a:solidFill>
-            <a:srgbClr val="1D4ED8"/>
-          </a:solidFill>
-          <a:ln w="12700">
-            <a:solidFill>
-              <a:srgbClr val="1D4ED8">
+      <p:pic>
+        <p:nvPicPr>
+          <p:cNvPr id="5" name="Image 0" descr="preencoded.png">    </p:cNvPr>
+          <p:cNvPicPr>
+            <a:picLocks noChangeAspect="1"/>
+          </p:cNvPicPr>
+          <p:nvPr/>
+        </p:nvPicPr>
+        <p:blipFill>
+          <a:blip r:embed="rId1">
+            <a:extLst>
+              <a:ext uri="{96DAC541-7B7A-43D3-8B79-37D633B846F1}">
+                <asvg:svgBlip xmlns:asvg="http://schemas.microsoft.com/office/drawing/2016/SVG/main" r:embed="rId2"/>
+              </a:ext>
+            </a:extLst>
+          </a:blip>
+          <a:stretch>
+            <a:fillRect/>
+          </a:stretch>
+        </p:blipFill>
+        <p:spPr>
+          <a:xfrm>
+            <a:off x="914400" y="1417320"/>
+            <a:ext cx="10241280" cy="4526280"/>
+          </a:xfrm>
+          <a:prstGeom prst="rect">
+            <a:avLst/>
+          </a:prstGeom>
+        </p:spPr>
+      </p:pic>
+      <p:sp>
+        <p:nvSpPr>
+          <p:cNvPr id="6" name="Shape 3"/>
+          <p:cNvSpPr/>
+          <p:nvPr/>
+        </p:nvSpPr>
+        <p:spPr>
+          <a:xfrm>
+            <a:off x="914400" y="1417320"/>
+            <a:ext cx="10241280" cy="4526280"/>
+          </a:xfrm>
+          <a:prstGeom prst="rect">
+            <a:avLst/>
+          </a:prstGeom>
+          <a:solidFill>
+            <a:srgbClr val="FFFFFF">
+              <a:alpha val="0"/>
+            </a:srgbClr>
+          </a:solidFill>
+          <a:ln w="12700">
+            <a:solidFill>
+              <a:srgbClr val="CBD5E1">
                 <a:alpha val="0"/>
               </a:srgbClr>
             </a:solidFill>
             <a:prstDash val="solid"/>
           </a:ln>
-        </p:spPr>
-      </p:sp>
-      <p:sp>
-        <p:nvSpPr>
-          <p:cNvPr id="6" name="Text 4"/>
+          <a:effectLst>
+            <a:outerShdw sx="100000" sy="100000" kx="0" ky="0" algn="bl" rotWithShape="0" blurRad="12700" dist="50800" dir="2700000">
+              <a:srgbClr val="000000">
+                <a:alpha val="8000"/>
+              </a:srgbClr>
+            </a:outerShdw>
+          </a:effectLst>
+        </p:spPr>
+      </p:sp>
+      <p:sp>
+        <p:nvSpPr>
+          <p:cNvPr id="7" name="Text 4"/>
           <p:cNvSpPr txBox="1"/>
           <p:nvPr/>
         </p:nvSpPr>
@@ -3196,8 +3235,8 @@
           </p:nvPr>
         </p:nvGraphicFramePr>
         <p:xfrm>
-          <a:off x="914400" y="1463040"/>
-          <a:ext cx="10241280" cy="4480560"/>
+          <a:off x="914400" y="1417320"/>
+          <a:ext cx="10241280" cy="4526280"/>
         </p:xfrm>
         <a:graphic>
           <a:graphicData uri="http://schemas.openxmlformats.org/drawingml/2006/table">
@@ -3208,7 +3247,7 @@
                 <a:gridCol w="3413760"/>
                 <a:gridCol w="3413760"/>
               </a:tblGrid>
-              <a:tr h="896112">
+              <a:tr h="905256">
                 <a:tc>
                   <a:txBody>
                     <a:bodyPr/>
@@ -3218,7 +3257,7 @@
                         <a:buNone/>
                       </a:pPr>
                       <a:r>
-                        <a:rPr lang="en-US" sz="2200" b="1" dirty="0">
+                        <a:rPr lang="en-US" sz="1800" b="1" dirty="0">
                           <a:solidFill>
                             <a:srgbClr val="FFFFFF"/>
                           </a:solidFill>
@@ -3228,7 +3267,7 @@
                         </a:rPr>
                         <a:t>Object</a:t>
                       </a:r>
-                      <a:endParaRPr lang="en-US" sz="2200" dirty="0">
+                      <a:endParaRPr lang="en-US" sz="1800" dirty="0">
                         <a:latin typeface="Pretendard" charset="0"/>
                         <a:ea typeface="Pretendard" charset="0"/>
                         <a:cs typeface="Pretendard" charset="0"/>
@@ -3286,7 +3325,7 @@
                         <a:buNone/>
                       </a:pPr>
                       <a:r>
-                        <a:rPr lang="en-US" sz="2200" b="1" dirty="0">
+                        <a:rPr lang="en-US" sz="1800" b="1" dirty="0">
                           <a:solidFill>
                             <a:srgbClr val="FFFFFF"/>
                           </a:solidFill>
@@ -3296,7 +3335,7 @@
                         </a:rPr>
                         <a:t>Renderer expectation</a:t>
                       </a:r>
-                      <a:endParaRPr lang="en-US" sz="2200" dirty="0">
+                      <a:endParaRPr lang="en-US" sz="1800" dirty="0">
                         <a:latin typeface="Pretendard" charset="0"/>
                         <a:ea typeface="Pretendard" charset="0"/>
                         <a:cs typeface="Pretendard" charset="0"/>
@@ -3354,7 +3393,7 @@
                         <a:buNone/>
                       </a:pPr>
                       <a:r>
-                        <a:rPr lang="en-US" sz="2200" b="1" dirty="0">
+                        <a:rPr lang="en-US" sz="1800" b="1" dirty="0">
                           <a:solidFill>
                             <a:srgbClr val="FFFFFF"/>
                           </a:solidFill>
@@ -3364,7 +3403,7 @@
                         </a:rPr>
                         <a:t>QA signal</a:t>
                       </a:r>
-                      <a:endParaRPr lang="en-US" sz="2200" dirty="0">
+                      <a:endParaRPr lang="en-US" sz="1800" dirty="0">
                         <a:latin typeface="Pretendard" charset="0"/>
                         <a:ea typeface="Pretendard" charset="0"/>
                         <a:cs typeface="Pretendard" charset="0"/>
@@ -3414,7 +3453,7 @@
                   </a:tcPr>
                 </a:tc>
               </a:tr>
-              <a:tr h="896112">
+              <a:tr h="905256">
                 <a:tc>
                   <a:txBody>
                     <a:bodyPr/>
@@ -3424,7 +3463,7 @@
                         <a:buNone/>
                       </a:pPr>
                       <a:r>
-                        <a:rPr lang="en-US" sz="2200" b="1" dirty="0">
+                        <a:rPr lang="en-US" sz="1800" b="1" dirty="0">
                           <a:solidFill>
                             <a:srgbClr val="0F172A"/>
                           </a:solidFill>
@@ -3434,7 +3473,7 @@
                         </a:rPr>
                         <a:t>Text box</a:t>
                       </a:r>
-                      <a:endParaRPr lang="en-US" sz="2200" dirty="0">
+                      <a:endParaRPr lang="en-US" sz="1800" dirty="0">
                         <a:latin typeface="Pretendard" charset="0"/>
                         <a:ea typeface="Pretendard" charset="0"/>
                         <a:cs typeface="Pretendard" charset="0"/>
@@ -3489,7 +3528,7 @@
                         <a:buNone/>
                       </a:pPr>
                       <a:r>
-                        <a:rPr lang="en-US" sz="2200" dirty="0">
+                        <a:rPr lang="en-US" sz="1800" dirty="0">
                           <a:solidFill>
                             <a:srgbClr val="0F172A"/>
                           </a:solidFill>
@@ -3499,7 +3538,7 @@
                         </a:rPr>
                         <a:t>editable, middle aligned</a:t>
                       </a:r>
-                      <a:endParaRPr lang="en-US" sz="2200" dirty="0">
+                      <a:endParaRPr lang="en-US" sz="1800" dirty="0">
                         <a:latin typeface="Pretendard" charset="0"/>
                         <a:ea typeface="Pretendard" charset="0"/>
                         <a:cs typeface="Pretendard" charset="0"/>
@@ -3554,7 +3593,7 @@
                         <a:buNone/>
                       </a:pPr>
                       <a:r>
-                        <a:rPr lang="en-US" sz="2200" dirty="0">
+                        <a:rPr lang="en-US" sz="1800" dirty="0">
                           <a:solidFill>
                             <a:srgbClr val="0F172A"/>
                           </a:solidFill>
@@ -3564,7 +3603,7 @@
                         </a:rPr>
                         <a:t>readable minimum size</a:t>
                       </a:r>
-                      <a:endParaRPr lang="en-US" sz="2200" dirty="0">
+                      <a:endParaRPr lang="en-US" sz="1800" dirty="0">
                         <a:latin typeface="Pretendard" charset="0"/>
                         <a:ea typeface="Pretendard" charset="0"/>
                         <a:cs typeface="Pretendard" charset="0"/>
@@ -3611,7 +3650,7 @@
                   </a:tcPr>
                 </a:tc>
               </a:tr>
-              <a:tr h="896112">
+              <a:tr h="905256">
                 <a:tc>
                   <a:txBody>
                     <a:bodyPr/>
@@ -3621,7 +3660,7 @@
                         <a:buNone/>
                       </a:pPr>
                       <a:r>
-                        <a:rPr lang="en-US" sz="2200" b="1" dirty="0">
+                        <a:rPr lang="en-US" sz="1800" b="1" dirty="0">
                           <a:solidFill>
                             <a:srgbClr val="0F172A"/>
                           </a:solidFill>
@@ -3631,7 +3670,7 @@
                         </a:rPr>
                         <a:t>Table</a:t>
                       </a:r>
-                      <a:endParaRPr lang="en-US" sz="2200" dirty="0">
+                      <a:endParaRPr lang="en-US" sz="1800" dirty="0">
                         <a:latin typeface="Pretendard" charset="0"/>
                         <a:ea typeface="Pretendard" charset="0"/>
                         <a:cs typeface="Pretendard" charset="0"/>
@@ -3691,7 +3730,7 @@
                         <a:buNone/>
                       </a:pPr>
                       <a:r>
-                        <a:rPr lang="en-US" sz="2200" dirty="0">
+                        <a:rPr lang="en-US" sz="1800" dirty="0">
                           <a:solidFill>
                             <a:srgbClr val="0F172A"/>
                           </a:solidFill>
@@ -3701,7 +3740,7 @@
                         </a:rPr>
                         <a:t>native table object</a:t>
                       </a:r>
-                      <a:endParaRPr lang="en-US" sz="2200" dirty="0">
+                      <a:endParaRPr lang="en-US" sz="1800" dirty="0">
                         <a:latin typeface="Pretendard" charset="0"/>
                         <a:ea typeface="Pretendard" charset="0"/>
                         <a:cs typeface="Pretendard" charset="0"/>
@@ -3761,7 +3800,7 @@
                         <a:buNone/>
                       </a:pPr>
                       <a:r>
-                        <a:rPr lang="en-US" sz="2200" dirty="0">
+                        <a:rPr lang="en-US" sz="1800" dirty="0">
                           <a:solidFill>
                             <a:srgbClr val="0F172A"/>
                           </a:solidFill>
@@ -3771,7 +3810,7 @@
                         </a:rPr>
                         <a:t>header fill and cell padding</a:t>
                       </a:r>
-                      <a:endParaRPr lang="en-US" sz="2200" dirty="0">
+                      <a:endParaRPr lang="en-US" sz="1800" dirty="0">
                         <a:latin typeface="Pretendard" charset="0"/>
                         <a:ea typeface="Pretendard" charset="0"/>
                         <a:cs typeface="Pretendard" charset="0"/>
@@ -3823,7 +3862,7 @@
                   </a:tcPr>
                 </a:tc>
               </a:tr>
-              <a:tr h="896112">
+              <a:tr h="905256">
                 <a:tc>
                   <a:txBody>
                     <a:bodyPr/>
@@ -3833,7 +3872,7 @@
                         <a:buNone/>
                       </a:pPr>
                       <a:r>
-                        <a:rPr lang="en-US" sz="2200" b="1" dirty="0">
+                        <a:rPr lang="en-US" sz="1800" b="1" dirty="0">
                           <a:solidFill>
                             <a:srgbClr val="0F172A"/>
                           </a:solidFill>
@@ -3843,7 +3882,7 @@
                         </a:rPr>
                         <a:t>Diagram</a:t>
                       </a:r>
-                      <a:endParaRPr lang="en-US" sz="2200" dirty="0">
+                      <a:endParaRPr lang="en-US" sz="1800" dirty="0">
                         <a:latin typeface="Pretendard" charset="0"/>
                         <a:ea typeface="Pretendard" charset="0"/>
                         <a:cs typeface="Pretendard" charset="0"/>
@@ -3898,7 +3937,7 @@
                         <a:buNone/>
                       </a:pPr>
                       <a:r>
-                        <a:rPr lang="en-US" sz="2200" dirty="0">
+                        <a:rPr lang="en-US" sz="1800" dirty="0">
                           <a:solidFill>
                             <a:srgbClr val="0F172A"/>
                           </a:solidFill>
@@ -3908,7 +3947,7 @@
                         </a:rPr>
                         <a:t>nodes and connectors</a:t>
                       </a:r>
-                      <a:endParaRPr lang="en-US" sz="2200" dirty="0">
+                      <a:endParaRPr lang="en-US" sz="1800" dirty="0">
                         <a:latin typeface="Pretendard" charset="0"/>
                         <a:ea typeface="Pretendard" charset="0"/>
                         <a:cs typeface="Pretendard" charset="0"/>
@@ -3963,7 +4002,7 @@
                         <a:buNone/>
                       </a:pPr>
                       <a:r>
-                        <a:rPr lang="en-US" sz="2200" dirty="0">
+                        <a:rPr lang="en-US" sz="1800" dirty="0">
                           <a:solidFill>
                             <a:srgbClr val="0F172A"/>
                           </a:solidFill>
@@ -3973,7 +4012,7 @@
                         </a:rPr>
                         <a:t>no clipped labels</a:t>
                       </a:r>
-                      <a:endParaRPr lang="en-US" sz="2200" dirty="0">
+                      <a:endParaRPr lang="en-US" sz="1800" dirty="0">
                         <a:latin typeface="Pretendard" charset="0"/>
                         <a:ea typeface="Pretendard" charset="0"/>
                         <a:cs typeface="Pretendard" charset="0"/>
@@ -4020,7 +4059,7 @@
                   </a:tcPr>
                 </a:tc>
               </a:tr>
-              <a:tr h="896112">
+              <a:tr h="905256">
                 <a:tc>
                   <a:txBody>
                     <a:bodyPr/>
@@ -4030,7 +4069,7 @@
                         <a:buNone/>
                       </a:pPr>
                       <a:r>
-                        <a:rPr lang="en-US" sz="2200" b="1" dirty="0">
+                        <a:rPr lang="en-US" sz="1800" b="1" dirty="0">
                           <a:solidFill>
                             <a:srgbClr val="0F172A"/>
                           </a:solidFill>
@@ -4040,7 +4079,7 @@
                         </a:rPr>
                         <a:t>Chart</a:t>
                       </a:r>
-                      <a:endParaRPr lang="en-US" sz="2200" dirty="0">
+                      <a:endParaRPr lang="en-US" sz="1800" dirty="0">
                         <a:latin typeface="Pretendard" charset="0"/>
                         <a:ea typeface="Pretendard" charset="0"/>
                         <a:cs typeface="Pretendard" charset="0"/>
@@ -4100,7 +4139,7 @@
                         <a:buNone/>
                       </a:pPr>
                       <a:r>
-                        <a:rPr lang="en-US" sz="2200" dirty="0">
+                        <a:rPr lang="en-US" sz="1800" dirty="0">
                           <a:solidFill>
                             <a:srgbClr val="0F172A"/>
                           </a:solidFill>
@@ -4110,7 +4149,7 @@
                         </a:rPr>
                         <a:t>theme-colored data object</a:t>
                       </a:r>
-                      <a:endParaRPr lang="en-US" sz="2200" dirty="0">
+                      <a:endParaRPr lang="en-US" sz="1800" dirty="0">
                         <a:latin typeface="Pretendard" charset="0"/>
                         <a:ea typeface="Pretendard" charset="0"/>
                         <a:cs typeface="Pretendard" charset="0"/>
@@ -4170,7 +4209,7 @@
                         <a:buNone/>
                       </a:pPr>
                       <a:r>
-                        <a:rPr lang="en-US" sz="2200" dirty="0">
+                        <a:rPr lang="en-US" sz="1800" dirty="0">
                           <a:solidFill>
                             <a:srgbClr val="0F172A"/>
                           </a:solidFill>
@@ -4180,7 +4219,7 @@
                         </a:rPr>
                         <a:t>contrast and value clarity</a:t>
                       </a:r>
-                      <a:endParaRPr lang="en-US" sz="2200" dirty="0">
+                      <a:endParaRPr lang="en-US" sz="1800" dirty="0">
                         <a:latin typeface="Pretendard" charset="0"/>
                         <a:ea typeface="Pretendard" charset="0"/>
                         <a:cs typeface="Pretendard" charset="0"/>
@@ -4752,36 +4791,75 @@
           </a:ln>
         </p:spPr>
       </p:sp>
-      <p:sp>
-        <p:nvSpPr>
-          <p:cNvPr id="5" name="Shape 3"/>
-          <p:cNvSpPr/>
-          <p:nvPr/>
-        </p:nvSpPr>
-        <p:spPr>
-          <a:xfrm>
-            <a:off x="914400" y="1463040"/>
-            <a:ext cx="10241280" cy="73152"/>
-          </a:xfrm>
-          <a:prstGeom prst="rect">
-            <a:avLst/>
-          </a:prstGeom>
-          <a:solidFill>
-            <a:srgbClr val="1D4ED8"/>
-          </a:solidFill>
-          <a:ln w="12700">
-            <a:solidFill>
-              <a:srgbClr val="1D4ED8">
+      <p:pic>
+        <p:nvPicPr>
+          <p:cNvPr id="5" name="Image 0" descr="preencoded.png">    </p:cNvPr>
+          <p:cNvPicPr>
+            <a:picLocks noChangeAspect="1"/>
+          </p:cNvPicPr>
+          <p:nvPr/>
+        </p:nvPicPr>
+        <p:blipFill>
+          <a:blip r:embed="rId1">
+            <a:extLst>
+              <a:ext uri="{96DAC541-7B7A-43D3-8B79-37D633B846F1}">
+                <asvg:svgBlip xmlns:asvg="http://schemas.microsoft.com/office/drawing/2016/SVG/main" r:embed="rId2"/>
+              </a:ext>
+            </a:extLst>
+          </a:blip>
+          <a:stretch>
+            <a:fillRect/>
+          </a:stretch>
+        </p:blipFill>
+        <p:spPr>
+          <a:xfrm>
+            <a:off x="914400" y="1417320"/>
+            <a:ext cx="10241280" cy="4526280"/>
+          </a:xfrm>
+          <a:prstGeom prst="rect">
+            <a:avLst/>
+          </a:prstGeom>
+        </p:spPr>
+      </p:pic>
+      <p:sp>
+        <p:nvSpPr>
+          <p:cNvPr id="6" name="Shape 3"/>
+          <p:cNvSpPr/>
+          <p:nvPr/>
+        </p:nvSpPr>
+        <p:spPr>
+          <a:xfrm>
+            <a:off x="914400" y="1417320"/>
+            <a:ext cx="10241280" cy="4526280"/>
+          </a:xfrm>
+          <a:prstGeom prst="rect">
+            <a:avLst/>
+          </a:prstGeom>
+          <a:solidFill>
+            <a:srgbClr val="FFFFFF">
+              <a:alpha val="0"/>
+            </a:srgbClr>
+          </a:solidFill>
+          <a:ln w="12700">
+            <a:solidFill>
+              <a:srgbClr val="CBD5E1">
                 <a:alpha val="0"/>
               </a:srgbClr>
             </a:solidFill>
             <a:prstDash val="solid"/>
           </a:ln>
-        </p:spPr>
-      </p:sp>
-      <p:sp>
-        <p:nvSpPr>
-          <p:cNvPr id="6" name="Text 4"/>
+          <a:effectLst>
+            <a:outerShdw sx="100000" sy="100000" kx="0" ky="0" algn="bl" rotWithShape="0" blurRad="12700" dist="50800" dir="2700000">
+              <a:srgbClr val="000000">
+                <a:alpha val="8000"/>
+              </a:srgbClr>
+            </a:outerShdw>
+          </a:effectLst>
+        </p:spPr>
+      </p:sp>
+      <p:sp>
+        <p:nvSpPr>
+          <p:cNvPr id="7" name="Text 4"/>
           <p:cNvSpPr txBox="1"/>
           <p:nvPr/>
         </p:nvSpPr>
@@ -4836,8 +4914,8 @@
           </p:nvPr>
         </p:nvGraphicFramePr>
         <p:xfrm>
-          <a:off x="914400" y="1463040"/>
-          <a:ext cx="10241280" cy="4480560"/>
+          <a:off x="914400" y="1417320"/>
+          <a:ext cx="10241280" cy="4526280"/>
         </p:xfrm>
         <a:graphic>
           <a:graphicData uri="http://schemas.openxmlformats.org/drawingml/2006/table">
@@ -4848,7 +4926,7 @@
                 <a:gridCol w="3413760"/>
                 <a:gridCol w="3413760"/>
               </a:tblGrid>
-              <a:tr h="1120140">
+              <a:tr h="1131570">
                 <a:tc>
                   <a:txBody>
                     <a:bodyPr/>
@@ -4858,7 +4936,7 @@
                         <a:buNone/>
                       </a:pPr>
                       <a:r>
-                        <a:rPr lang="en-US" sz="2200" b="1" dirty="0">
+                        <a:rPr lang="en-US" sz="1800" b="1" dirty="0">
                           <a:solidFill>
                             <a:srgbClr val="FFFFFF"/>
                           </a:solidFill>
@@ -4868,7 +4946,7 @@
                         </a:rPr>
                         <a:t>Stage</a:t>
                       </a:r>
-                      <a:endParaRPr lang="en-US" sz="2200" dirty="0">
+                      <a:endParaRPr lang="en-US" sz="1800" dirty="0">
                         <a:latin typeface="Pretendard" charset="0"/>
                         <a:ea typeface="Pretendard" charset="0"/>
                         <a:cs typeface="Pretendard" charset="0"/>
@@ -4926,7 +5004,7 @@
                         <a:buNone/>
                       </a:pPr>
                       <a:r>
-                        <a:rPr lang="en-US" sz="2200" b="1" dirty="0">
+                        <a:rPr lang="en-US" sz="1800" b="1" dirty="0">
                           <a:solidFill>
                             <a:srgbClr val="FFFFFF"/>
                           </a:solidFill>
@@ -4936,7 +5014,7 @@
                         </a:rPr>
                         <a:t>Coverage</a:t>
                       </a:r>
-                      <a:endParaRPr lang="en-US" sz="2200" dirty="0">
+                      <a:endParaRPr lang="en-US" sz="1800" dirty="0">
                         <a:latin typeface="Pretendard" charset="0"/>
                         <a:ea typeface="Pretendard" charset="0"/>
                         <a:cs typeface="Pretendard" charset="0"/>
@@ -4994,7 +5072,7 @@
                         <a:buNone/>
                       </a:pPr>
                       <a:r>
-                        <a:rPr lang="en-US" sz="2200" b="1" dirty="0">
+                        <a:rPr lang="en-US" sz="1800" b="1" dirty="0">
                           <a:solidFill>
                             <a:srgbClr val="FFFFFF"/>
                           </a:solidFill>
@@ -5004,7 +5082,7 @@
                         </a:rPr>
                         <a:t>Defects</a:t>
                       </a:r>
-                      <a:endParaRPr lang="en-US" sz="2200" dirty="0">
+                      <a:endParaRPr lang="en-US" sz="1800" dirty="0">
                         <a:latin typeface="Pretendard" charset="0"/>
                         <a:ea typeface="Pretendard" charset="0"/>
                         <a:cs typeface="Pretendard" charset="0"/>
@@ -5054,7 +5132,7 @@
                   </a:tcPr>
                 </a:tc>
               </a:tr>
-              <a:tr h="1120140">
+              <a:tr h="1131570">
                 <a:tc>
                   <a:txBody>
                     <a:bodyPr/>
@@ -5064,7 +5142,7 @@
                         <a:buNone/>
                       </a:pPr>
                       <a:r>
-                        <a:rPr lang="en-US" sz="2200" b="1" dirty="0">
+                        <a:rPr lang="en-US" sz="1800" b="1" dirty="0">
                           <a:solidFill>
                             <a:srgbClr val="0F172A"/>
                           </a:solidFill>
@@ -5074,7 +5152,7 @@
                         </a:rPr>
                         <a:t>Parser</a:t>
                       </a:r>
-                      <a:endParaRPr lang="en-US" sz="2200" dirty="0">
+                      <a:endParaRPr lang="en-US" sz="1800" dirty="0">
                         <a:latin typeface="Pretendard" charset="0"/>
                         <a:ea typeface="Pretendard" charset="0"/>
                         <a:cs typeface="Pretendard" charset="0"/>
@@ -5129,7 +5207,7 @@
                         <a:buNone/>
                       </a:pPr>
                       <a:r>
-                        <a:rPr lang="en-US" sz="2200" dirty="0">
+                        <a:rPr lang="en-US" sz="1800" dirty="0">
                           <a:solidFill>
                             <a:srgbClr val="0F172A"/>
                           </a:solidFill>
@@ -5139,7 +5217,7 @@
                         </a:rPr>
                         <a:t>92</a:t>
                       </a:r>
-                      <a:endParaRPr lang="en-US" sz="2200" dirty="0">
+                      <a:endParaRPr lang="en-US" sz="1800" dirty="0">
                         <a:latin typeface="Pretendard" charset="0"/>
                         <a:ea typeface="Pretendard" charset="0"/>
                         <a:cs typeface="Pretendard" charset="0"/>
@@ -5194,7 +5272,7 @@
                         <a:buNone/>
                       </a:pPr>
                       <a:r>
-                        <a:rPr lang="en-US" sz="2200" dirty="0">
+                        <a:rPr lang="en-US" sz="1800" dirty="0">
                           <a:solidFill>
                             <a:srgbClr val="0F172A"/>
                           </a:solidFill>
@@ -5204,7 +5282,7 @@
                         </a:rPr>
                         <a:t>3</a:t>
                       </a:r>
-                      <a:endParaRPr lang="en-US" sz="2200" dirty="0">
+                      <a:endParaRPr lang="en-US" sz="1800" dirty="0">
                         <a:latin typeface="Pretendard" charset="0"/>
                         <a:ea typeface="Pretendard" charset="0"/>
                         <a:cs typeface="Pretendard" charset="0"/>
@@ -5251,7 +5329,7 @@
                   </a:tcPr>
                 </a:tc>
               </a:tr>
-              <a:tr h="1120140">
+              <a:tr h="1131570">
                 <a:tc>
                   <a:txBody>
                     <a:bodyPr/>
@@ -5261,7 +5339,7 @@
                         <a:buNone/>
                       </a:pPr>
                       <a:r>
-                        <a:rPr lang="en-US" sz="2200" b="1" dirty="0">
+                        <a:rPr lang="en-US" sz="1800" b="1" dirty="0">
                           <a:solidFill>
                             <a:srgbClr val="0F172A"/>
                           </a:solidFill>
@@ -5271,7 +5349,7 @@
                         </a:rPr>
                         <a:t>Layout</a:t>
                       </a:r>
-                      <a:endParaRPr lang="en-US" sz="2200" dirty="0">
+                      <a:endParaRPr lang="en-US" sz="1800" dirty="0">
                         <a:latin typeface="Pretendard" charset="0"/>
                         <a:ea typeface="Pretendard" charset="0"/>
                         <a:cs typeface="Pretendard" charset="0"/>
@@ -5331,7 +5409,7 @@
                         <a:buNone/>
                       </a:pPr>
                       <a:r>
-                        <a:rPr lang="en-US" sz="2200" dirty="0">
+                        <a:rPr lang="en-US" sz="1800" dirty="0">
                           <a:solidFill>
                             <a:srgbClr val="0F172A"/>
                           </a:solidFill>
@@ -5341,7 +5419,7 @@
                         </a:rPr>
                         <a:t>88</a:t>
                       </a:r>
-                      <a:endParaRPr lang="en-US" sz="2200" dirty="0">
+                      <a:endParaRPr lang="en-US" sz="1800" dirty="0">
                         <a:latin typeface="Pretendard" charset="0"/>
                         <a:ea typeface="Pretendard" charset="0"/>
                         <a:cs typeface="Pretendard" charset="0"/>
@@ -5401,7 +5479,7 @@
                         <a:buNone/>
                       </a:pPr>
                       <a:r>
-                        <a:rPr lang="en-US" sz="2200" dirty="0">
+                        <a:rPr lang="en-US" sz="1800" dirty="0">
                           <a:solidFill>
                             <a:srgbClr val="0F172A"/>
                           </a:solidFill>
@@ -5411,7 +5489,7 @@
                         </a:rPr>
                         <a:t>5</a:t>
                       </a:r>
-                      <a:endParaRPr lang="en-US" sz="2200" dirty="0">
+                      <a:endParaRPr lang="en-US" sz="1800" dirty="0">
                         <a:latin typeface="Pretendard" charset="0"/>
                         <a:ea typeface="Pretendard" charset="0"/>
                         <a:cs typeface="Pretendard" charset="0"/>
@@ -5463,7 +5541,7 @@
                   </a:tcPr>
                 </a:tc>
               </a:tr>
-              <a:tr h="1120140">
+              <a:tr h="1131570">
                 <a:tc>
                   <a:txBody>
                     <a:bodyPr/>
@@ -5473,7 +5551,7 @@
                         <a:buNone/>
                       </a:pPr>
                       <a:r>
-                        <a:rPr lang="en-US" sz="2200" b="1" dirty="0">
+                        <a:rPr lang="en-US" sz="1800" b="1" dirty="0">
                           <a:solidFill>
                             <a:srgbClr val="0F172A"/>
                           </a:solidFill>
@@ -5483,7 +5561,7 @@
                         </a:rPr>
                         <a:t>PPTX</a:t>
                       </a:r>
-                      <a:endParaRPr lang="en-US" sz="2200" dirty="0">
+                      <a:endParaRPr lang="en-US" sz="1800" dirty="0">
                         <a:latin typeface="Pretendard" charset="0"/>
                         <a:ea typeface="Pretendard" charset="0"/>
                         <a:cs typeface="Pretendard" charset="0"/>
@@ -5538,7 +5616,7 @@
                         <a:buNone/>
                       </a:pPr>
                       <a:r>
-                        <a:rPr lang="en-US" sz="2200" dirty="0">
+                        <a:rPr lang="en-US" sz="1800" dirty="0">
                           <a:solidFill>
                             <a:srgbClr val="0F172A"/>
                           </a:solidFill>
@@ -5548,7 +5626,7 @@
                         </a:rPr>
                         <a:t>95</a:t>
                       </a:r>
-                      <a:endParaRPr lang="en-US" sz="2200" dirty="0">
+                      <a:endParaRPr lang="en-US" sz="1800" dirty="0">
                         <a:latin typeface="Pretendard" charset="0"/>
                         <a:ea typeface="Pretendard" charset="0"/>
                         <a:cs typeface="Pretendard" charset="0"/>
@@ -5603,7 +5681,7 @@
                         <a:buNone/>
                       </a:pPr>
                       <a:r>
-                        <a:rPr lang="en-US" sz="2200" dirty="0">
+                        <a:rPr lang="en-US" sz="1800" dirty="0">
                           <a:solidFill>
                             <a:srgbClr val="0F172A"/>
                           </a:solidFill>
@@ -5613,7 +5691,7 @@
                         </a:rPr>
                         <a:t>2</a:t>
                       </a:r>
-                      <a:endParaRPr lang="en-US" sz="2200" dirty="0">
+                      <a:endParaRPr lang="en-US" sz="1800" dirty="0">
                         <a:latin typeface="Pretendard" charset="0"/>
                         <a:ea typeface="Pretendard" charset="0"/>
                         <a:cs typeface="Pretendard" charset="0"/>
